--- a/Testarea property-based folosind QuickCheck - redesign-all - more-slides.pptx
+++ b/Testarea property-based folosind QuickCheck - redesign-all - more-slides.pptx
@@ -5,32 +5,32 @@
     <p:sldMasterId id="2147483746" r:id="rId4"/>
   </p:sldMasterIdLst>
   <p:sldIdLst>
-    <p:sldId id="256" r:id="rId9"/>
-    <p:sldId id="257" r:id="rId10"/>
-    <p:sldId id="258" r:id="rId11"/>
-    <p:sldId id="259" r:id="rId12"/>
-    <p:sldId id="260" r:id="rId13"/>
-    <p:sldId id="261" r:id="rId14"/>
-    <p:sldId id="262" r:id="rId8"/>
-    <p:sldId id="263" r:id="rId7"/>
-    <p:sldId id="264" r:id="rId6"/>
-    <p:sldId id="265" r:id="rId5"/>
-    <p:sldId id="266" r:id="rId19"/>
-    <p:sldId id="267" r:id="rId20"/>
-    <p:sldId id="268" r:id="rId21"/>
-    <p:sldId id="269" r:id="rId22"/>
-    <p:sldId id="270" r:id="rId23"/>
-    <p:sldId id="271" r:id="rId24"/>
-    <p:sldId id="272" r:id="rId25"/>
-    <p:sldId id="273" r:id="rId26"/>
-    <p:sldId id="274" r:id="rId27"/>
-    <p:sldId id="275" r:id="rId28"/>
-    <p:sldId id="276" r:id="rId29"/>
-    <p:sldId id="277" r:id="rId30"/>
-    <p:sldId id="278" r:id="rId31"/>
-    <p:sldId id="279" r:id="rId32"/>
-    <p:sldId id="280" r:id="rId33"/>
-    <p:sldId id="281" r:id="rId34"/>
+    <p:sldId id="256" r:id="rId5"/>
+    <p:sldId id="257" r:id="rId6"/>
+    <p:sldId id="258" r:id="rId7"/>
+    <p:sldId id="259" r:id="rId8"/>
+    <p:sldId id="260" r:id="rId9"/>
+    <p:sldId id="261" r:id="rId10"/>
+    <p:sldId id="262" r:id="rId11"/>
+    <p:sldId id="263" r:id="rId12"/>
+    <p:sldId id="264" r:id="rId13"/>
+    <p:sldId id="265" r:id="rId14"/>
+    <p:sldId id="266" r:id="rId15"/>
+    <p:sldId id="267" r:id="rId16"/>
+    <p:sldId id="268" r:id="rId17"/>
+    <p:sldId id="269" r:id="rId18"/>
+    <p:sldId id="270" r:id="rId19"/>
+    <p:sldId id="271" r:id="rId20"/>
+    <p:sldId id="272" r:id="rId21"/>
+    <p:sldId id="273" r:id="rId22"/>
+    <p:sldId id="274" r:id="rId23"/>
+    <p:sldId id="275" r:id="rId24"/>
+    <p:sldId id="276" r:id="rId25"/>
+    <p:sldId id="277" r:id="rId26"/>
+    <p:sldId id="278" r:id="rId27"/>
+    <p:sldId id="279" r:id="rId28"/>
+    <p:sldId id="280" r:id="rId29"/>
+    <p:sldId id="281" r:id="rId30"/>
   </p:sldIdLst>
   <p:sldSz cx="12192000" cy="6858000"/>
   <p:notesSz cx="6858000" cy="9144000"/>
@@ -131,7 +131,7 @@
   </p:defaultTextStyle>
   <p:extLst>
     <p:ext uri="{EFAFB233-063F-42B5-8137-9DF3F51BA10A}">
-      <p15:sldGuideLst xmlns:p15="http://schemas.microsoft.com/office/powerpoint/2012/main"/>
+      <p15:sldGuideLst xmlns:p15="http://schemas.microsoft.com/office/powerpoint/2012/main" xmlns=""/>
     </p:ext>
   </p:extLst>
 </p:presentation>
@@ -159,7 +159,7 @@
           <p:cNvPr id="10" name="Rectangle 9">
             <a:extLst>
               <a:ext uri="{FF2B5EF4-FFF2-40B4-BE49-F238E27FC236}">
-                <a16:creationId xmlns:a16="http://schemas.microsoft.com/office/drawing/2014/main" id="{39E3965E-AC41-4711-9D10-E25ABB132D86}"/>
+                <a16:creationId xmlns:a16="http://schemas.microsoft.com/office/drawing/2014/main" xmlns="" id="{39E3965E-AC41-4711-9D10-E25ABB132D86}"/>
               </a:ext>
             </a:extLst>
           </p:cNvPr>
@@ -319,7 +319,7 @@
           <p:cNvPr id="9" name="Straight Connector 8">
             <a:extLst>
               <a:ext uri="{FF2B5EF4-FFF2-40B4-BE49-F238E27FC236}">
-                <a16:creationId xmlns:a16="http://schemas.microsoft.com/office/drawing/2014/main" id="{1F5DC8C3-BA5F-4EED-BB9A-A14272BD82A1}"/>
+                <a16:creationId xmlns:a16="http://schemas.microsoft.com/office/drawing/2014/main" xmlns="" id="{1F5DC8C3-BA5F-4EED-BB9A-A14272BD82A1}"/>
               </a:ext>
             </a:extLst>
           </p:cNvPr>
@@ -363,7 +363,7 @@
           <p:cNvPr id="4" name="Date Placeholder 3">
             <a:extLst>
               <a:ext uri="{FF2B5EF4-FFF2-40B4-BE49-F238E27FC236}">
-                <a16:creationId xmlns:a16="http://schemas.microsoft.com/office/drawing/2014/main" id="{9925CCF1-92C0-4AF3-BFAF-4921631915AB}"/>
+                <a16:creationId xmlns:a16="http://schemas.microsoft.com/office/drawing/2014/main" xmlns="" id="{9925CCF1-92C0-4AF3-BFAF-4921631915AB}"/>
               </a:ext>
             </a:extLst>
           </p:cNvPr>
@@ -381,7 +381,7 @@
           <a:p>
             <a:fld id="{9184DA70-C731-4C70-880D-CCD4705E623C}" type="datetime1">
               <a:rPr lang="en-US" smtClean="0"/>
-              <a:t>4/21/2026</a:t>
+              <a:t>4/22/2026</a:t>
             </a:fld>
             <a:endParaRPr lang="en-US" dirty="0"/>
           </a:p>
@@ -392,7 +392,7 @@
           <p:cNvPr id="5" name="Footer Placeholder 4">
             <a:extLst>
               <a:ext uri="{FF2B5EF4-FFF2-40B4-BE49-F238E27FC236}">
-                <a16:creationId xmlns:a16="http://schemas.microsoft.com/office/drawing/2014/main" id="{051A78A9-3DFF-4937-A9F2-5D8CF495F367}"/>
+                <a16:creationId xmlns:a16="http://schemas.microsoft.com/office/drawing/2014/main" xmlns="" id="{051A78A9-3DFF-4937-A9F2-5D8CF495F367}"/>
               </a:ext>
             </a:extLst>
           </p:cNvPr>
@@ -417,7 +417,7 @@
           <p:cNvPr id="6" name="Slide Number Placeholder 5">
             <a:extLst>
               <a:ext uri="{FF2B5EF4-FFF2-40B4-BE49-F238E27FC236}">
-                <a16:creationId xmlns:a16="http://schemas.microsoft.com/office/drawing/2014/main" id="{5FAEB271-5CC0-4759-BC6E-8BE53AB227C0}"/>
+                <a16:creationId xmlns:a16="http://schemas.microsoft.com/office/drawing/2014/main" xmlns="" id="{5FAEB271-5CC0-4759-BC6E-8BE53AB227C0}"/>
               </a:ext>
             </a:extLst>
           </p:cNvPr>
@@ -551,7 +551,7 @@
           <p:cNvPr id="7" name="Date Placeholder 6">
             <a:extLst>
               <a:ext uri="{FF2B5EF4-FFF2-40B4-BE49-F238E27FC236}">
-                <a16:creationId xmlns:a16="http://schemas.microsoft.com/office/drawing/2014/main" id="{7D5506EE-1026-4F35-9ACC-BD05BE0F9B36}"/>
+                <a16:creationId xmlns:a16="http://schemas.microsoft.com/office/drawing/2014/main" xmlns="" id="{7D5506EE-1026-4F35-9ACC-BD05BE0F9B36}"/>
               </a:ext>
             </a:extLst>
           </p:cNvPr>
@@ -569,7 +569,7 @@
           <a:p>
             <a:fld id="{B612A279-0833-481D-8C56-F67FD0AC6C50}" type="datetime1">
               <a:rPr lang="en-US" smtClean="0"/>
-              <a:t>4/21/2026</a:t>
+              <a:t>4/22/2026</a:t>
             </a:fld>
             <a:endParaRPr lang="en-US" dirty="0"/>
           </a:p>
@@ -580,7 +580,7 @@
           <p:cNvPr id="8" name="Footer Placeholder 7">
             <a:extLst>
               <a:ext uri="{FF2B5EF4-FFF2-40B4-BE49-F238E27FC236}">
-                <a16:creationId xmlns:a16="http://schemas.microsoft.com/office/drawing/2014/main" id="{B7696E5F-8D95-4450-AE52-5438E6EDE2BF}"/>
+                <a16:creationId xmlns:a16="http://schemas.microsoft.com/office/drawing/2014/main" xmlns="" id="{B7696E5F-8D95-4450-AE52-5438E6EDE2BF}"/>
               </a:ext>
             </a:extLst>
           </p:cNvPr>
@@ -605,7 +605,7 @@
           <p:cNvPr id="9" name="Slide Number Placeholder 8">
             <a:extLst>
               <a:ext uri="{FF2B5EF4-FFF2-40B4-BE49-F238E27FC236}">
-                <a16:creationId xmlns:a16="http://schemas.microsoft.com/office/drawing/2014/main" id="{999B2253-74CC-409E-BEB0-F8EFCFCB5629}"/>
+                <a16:creationId xmlns:a16="http://schemas.microsoft.com/office/drawing/2014/main" xmlns="" id="{999B2253-74CC-409E-BEB0-F8EFCFCB5629}"/>
               </a:ext>
             </a:extLst>
           </p:cNvPr>
@@ -664,7 +664,7 @@
           <p:cNvPr id="9" name="Rectangle 8">
             <a:extLst>
               <a:ext uri="{FF2B5EF4-FFF2-40B4-BE49-F238E27FC236}">
-                <a16:creationId xmlns:a16="http://schemas.microsoft.com/office/drawing/2014/main" id="{E1B68A5B-D9FA-424B-A4EB-30E7223836B3}"/>
+                <a16:creationId xmlns:a16="http://schemas.microsoft.com/office/drawing/2014/main" xmlns="" id="{E1B68A5B-D9FA-424B-A4EB-30E7223836B3}"/>
               </a:ext>
             </a:extLst>
           </p:cNvPr>
@@ -793,7 +793,7 @@
           <p:cNvPr id="7" name="Date Placeholder 6">
             <a:extLst>
               <a:ext uri="{FF2B5EF4-FFF2-40B4-BE49-F238E27FC236}">
-                <a16:creationId xmlns:a16="http://schemas.microsoft.com/office/drawing/2014/main" id="{AF33D6B0-F070-45C4-A472-19F432BE3932}"/>
+                <a16:creationId xmlns:a16="http://schemas.microsoft.com/office/drawing/2014/main" xmlns="" id="{AF33D6B0-F070-45C4-A472-19F432BE3932}"/>
               </a:ext>
             </a:extLst>
           </p:cNvPr>
@@ -811,7 +811,7 @@
           <a:p>
             <a:fld id="{6587DA83-5663-4C9C-B9AA-0B40A3DAFF81}" type="datetime1">
               <a:rPr lang="en-US" smtClean="0"/>
-              <a:t>4/21/2026</a:t>
+              <a:t>4/22/2026</a:t>
             </a:fld>
             <a:endParaRPr lang="en-US" dirty="0"/>
           </a:p>
@@ -822,7 +822,7 @@
           <p:cNvPr id="8" name="Footer Placeholder 7">
             <a:extLst>
               <a:ext uri="{FF2B5EF4-FFF2-40B4-BE49-F238E27FC236}">
-                <a16:creationId xmlns:a16="http://schemas.microsoft.com/office/drawing/2014/main" id="{9975399F-DAB2-410D-967F-ED17E6F796E7}"/>
+                <a16:creationId xmlns:a16="http://schemas.microsoft.com/office/drawing/2014/main" xmlns="" id="{9975399F-DAB2-410D-967F-ED17E6F796E7}"/>
               </a:ext>
             </a:extLst>
           </p:cNvPr>
@@ -847,7 +847,7 @@
           <p:cNvPr id="10" name="Slide Number Placeholder 9">
             <a:extLst>
               <a:ext uri="{FF2B5EF4-FFF2-40B4-BE49-F238E27FC236}">
-                <a16:creationId xmlns:a16="http://schemas.microsoft.com/office/drawing/2014/main" id="{F762A46F-6BE5-4D12-9412-5CA7672EA8EC}"/>
+                <a16:creationId xmlns:a16="http://schemas.microsoft.com/office/drawing/2014/main" xmlns="" id="{F762A46F-6BE5-4D12-9412-5CA7672EA8EC}"/>
               </a:ext>
             </a:extLst>
           </p:cNvPr>
@@ -981,7 +981,7 @@
           <p:cNvPr id="7" name="Date Placeholder 6">
             <a:extLst>
               <a:ext uri="{FF2B5EF4-FFF2-40B4-BE49-F238E27FC236}">
-                <a16:creationId xmlns:a16="http://schemas.microsoft.com/office/drawing/2014/main" id="{354D8B55-9EA8-4B81-8E84-9B93B0A27559}"/>
+                <a16:creationId xmlns:a16="http://schemas.microsoft.com/office/drawing/2014/main" xmlns="" id="{354D8B55-9EA8-4B81-8E84-9B93B0A27559}"/>
               </a:ext>
             </a:extLst>
           </p:cNvPr>
@@ -999,7 +999,7 @@
           <a:p>
             <a:fld id="{4BE1D723-8F53-4F53-90B0-1982A396982E}" type="datetime1">
               <a:rPr lang="en-US" smtClean="0"/>
-              <a:t>4/21/2026</a:t>
+              <a:t>4/22/2026</a:t>
             </a:fld>
             <a:endParaRPr lang="en-US" dirty="0"/>
           </a:p>
@@ -1010,7 +1010,7 @@
           <p:cNvPr id="8" name="Footer Placeholder 7">
             <a:extLst>
               <a:ext uri="{FF2B5EF4-FFF2-40B4-BE49-F238E27FC236}">
-                <a16:creationId xmlns:a16="http://schemas.microsoft.com/office/drawing/2014/main" id="{062CA021-2578-47CB-822C-BDDFF7223B28}"/>
+                <a16:creationId xmlns:a16="http://schemas.microsoft.com/office/drawing/2014/main" xmlns="" id="{062CA021-2578-47CB-822C-BDDFF7223B28}"/>
               </a:ext>
             </a:extLst>
           </p:cNvPr>
@@ -1035,7 +1035,7 @@
           <p:cNvPr id="9" name="Slide Number Placeholder 8">
             <a:extLst>
               <a:ext uri="{FF2B5EF4-FFF2-40B4-BE49-F238E27FC236}">
-                <a16:creationId xmlns:a16="http://schemas.microsoft.com/office/drawing/2014/main" id="{C4AAB51D-4141-4682-9375-DAFD5FB9DD10}"/>
+                <a16:creationId xmlns:a16="http://schemas.microsoft.com/office/drawing/2014/main" xmlns="" id="{C4AAB51D-4141-4682-9375-DAFD5FB9DD10}"/>
               </a:ext>
             </a:extLst>
           </p:cNvPr>
@@ -1102,7 +1102,7 @@
           <p:cNvPr id="10" name="Rectangle 9">
             <a:extLst>
               <a:ext uri="{FF2B5EF4-FFF2-40B4-BE49-F238E27FC236}">
-                <a16:creationId xmlns:a16="http://schemas.microsoft.com/office/drawing/2014/main" id="{A585C21A-8B93-4657-B5DF-7EAEAD3BE127}"/>
+                <a16:creationId xmlns:a16="http://schemas.microsoft.com/office/drawing/2014/main" xmlns="" id="{A585C21A-8B93-4657-B5DF-7EAEAD3BE127}"/>
               </a:ext>
             </a:extLst>
           </p:cNvPr>
@@ -1310,7 +1310,7 @@
           <p:cNvPr id="9" name="Straight Connector 8">
             <a:extLst>
               <a:ext uri="{FF2B5EF4-FFF2-40B4-BE49-F238E27FC236}">
-                <a16:creationId xmlns:a16="http://schemas.microsoft.com/office/drawing/2014/main" id="{459DE2C1-4C52-40A3-8959-27B2C1BEBFF6}"/>
+                <a16:creationId xmlns:a16="http://schemas.microsoft.com/office/drawing/2014/main" xmlns="" id="{459DE2C1-4C52-40A3-8959-27B2C1BEBFF6}"/>
               </a:ext>
             </a:extLst>
           </p:cNvPr>
@@ -1354,7 +1354,7 @@
           <p:cNvPr id="7" name="Date Placeholder 6">
             <a:extLst>
               <a:ext uri="{FF2B5EF4-FFF2-40B4-BE49-F238E27FC236}">
-                <a16:creationId xmlns:a16="http://schemas.microsoft.com/office/drawing/2014/main" id="{AAF2E137-EC28-48F8-9198-1F02539029B6}"/>
+                <a16:creationId xmlns:a16="http://schemas.microsoft.com/office/drawing/2014/main" xmlns="" id="{AAF2E137-EC28-48F8-9198-1F02539029B6}"/>
               </a:ext>
             </a:extLst>
           </p:cNvPr>
@@ -1372,7 +1372,7 @@
           <a:p>
             <a:fld id="{97669AF7-7BEB-44E4-9852-375E34362B5B}" type="datetime1">
               <a:rPr lang="en-US" smtClean="0"/>
-              <a:t>4/21/2026</a:t>
+              <a:t>4/22/2026</a:t>
             </a:fld>
             <a:endParaRPr lang="en-US" dirty="0"/>
           </a:p>
@@ -1383,7 +1383,7 @@
           <p:cNvPr id="8" name="Footer Placeholder 7">
             <a:extLst>
               <a:ext uri="{FF2B5EF4-FFF2-40B4-BE49-F238E27FC236}">
-                <a16:creationId xmlns:a16="http://schemas.microsoft.com/office/drawing/2014/main" id="{189422CD-6F62-4DD6-89EF-07A60B42D219}"/>
+                <a16:creationId xmlns:a16="http://schemas.microsoft.com/office/drawing/2014/main" xmlns="" id="{189422CD-6F62-4DD6-89EF-07A60B42D219}"/>
               </a:ext>
             </a:extLst>
           </p:cNvPr>
@@ -1408,7 +1408,7 @@
           <p:cNvPr id="11" name="Slide Number Placeholder 10">
             <a:extLst>
               <a:ext uri="{FF2B5EF4-FFF2-40B4-BE49-F238E27FC236}">
-                <a16:creationId xmlns:a16="http://schemas.microsoft.com/office/drawing/2014/main" id="{69C6AFF8-42B4-4D05-969B-9F5FB3355555}"/>
+                <a16:creationId xmlns:a16="http://schemas.microsoft.com/office/drawing/2014/main" xmlns="" id="{69C6AFF8-42B4-4D05-969B-9F5FB3355555}"/>
               </a:ext>
             </a:extLst>
           </p:cNvPr>
@@ -1609,7 +1609,7 @@
           <p:cNvPr id="2" name="Date Placeholder 1">
             <a:extLst>
               <a:ext uri="{FF2B5EF4-FFF2-40B4-BE49-F238E27FC236}">
-                <a16:creationId xmlns:a16="http://schemas.microsoft.com/office/drawing/2014/main" id="{5782D47D-B0DC-4C40-BCC6-BBBA32584A38}"/>
+                <a16:creationId xmlns:a16="http://schemas.microsoft.com/office/drawing/2014/main" xmlns="" id="{5782D47D-B0DC-4C40-BCC6-BBBA32584A38}"/>
               </a:ext>
             </a:extLst>
           </p:cNvPr>
@@ -1627,7 +1627,7 @@
           <a:p>
             <a:fld id="{BAAAC38D-0552-4C82-B593-E6124DFADBE2}" type="datetime1">
               <a:rPr lang="en-US" smtClean="0"/>
-              <a:t>4/21/2026</a:t>
+              <a:t>4/22/2026</a:t>
             </a:fld>
             <a:endParaRPr lang="en-US" dirty="0"/>
           </a:p>
@@ -1638,7 +1638,7 @@
           <p:cNvPr id="9" name="Footer Placeholder 8">
             <a:extLst>
               <a:ext uri="{FF2B5EF4-FFF2-40B4-BE49-F238E27FC236}">
-                <a16:creationId xmlns:a16="http://schemas.microsoft.com/office/drawing/2014/main" id="{4690D34E-7EBD-44B2-83CA-4C126A18D7EF}"/>
+                <a16:creationId xmlns:a16="http://schemas.microsoft.com/office/drawing/2014/main" xmlns="" id="{4690D34E-7EBD-44B2-83CA-4C126A18D7EF}"/>
               </a:ext>
             </a:extLst>
           </p:cNvPr>
@@ -1663,7 +1663,7 @@
           <p:cNvPr id="10" name="Slide Number Placeholder 9">
             <a:extLst>
               <a:ext uri="{FF2B5EF4-FFF2-40B4-BE49-F238E27FC236}">
-                <a16:creationId xmlns:a16="http://schemas.microsoft.com/office/drawing/2014/main" id="{2AC511A1-9BBD-42DE-92FB-2AF44F8E97A9}"/>
+                <a16:creationId xmlns:a16="http://schemas.microsoft.com/office/drawing/2014/main" xmlns="" id="{2AC511A1-9BBD-42DE-92FB-2AF44F8E97A9}"/>
               </a:ext>
             </a:extLst>
           </p:cNvPr>
@@ -2006,7 +2006,7 @@
           <p:cNvPr id="2" name="Date Placeholder 1">
             <a:extLst>
               <a:ext uri="{FF2B5EF4-FFF2-40B4-BE49-F238E27FC236}">
-                <a16:creationId xmlns:a16="http://schemas.microsoft.com/office/drawing/2014/main" id="{8AF8A515-AA94-45D1-9223-5C2272618D85}"/>
+                <a16:creationId xmlns:a16="http://schemas.microsoft.com/office/drawing/2014/main" xmlns="" id="{8AF8A515-AA94-45D1-9223-5C2272618D85}"/>
               </a:ext>
             </a:extLst>
           </p:cNvPr>
@@ -2024,7 +2024,7 @@
           <a:p>
             <a:fld id="{D9DF0F1C-5577-4ACB-BB62-DF8F3C494C7E}" type="datetime1">
               <a:rPr lang="en-US" smtClean="0"/>
-              <a:t>4/21/2026</a:t>
+              <a:t>4/22/2026</a:t>
             </a:fld>
             <a:endParaRPr lang="en-US" dirty="0"/>
           </a:p>
@@ -2035,7 +2035,7 @@
           <p:cNvPr id="11" name="Footer Placeholder 10">
             <a:extLst>
               <a:ext uri="{FF2B5EF4-FFF2-40B4-BE49-F238E27FC236}">
-                <a16:creationId xmlns:a16="http://schemas.microsoft.com/office/drawing/2014/main" id="{D052F5BC-98E0-4D60-AD67-9547738B7DD4}"/>
+                <a16:creationId xmlns:a16="http://schemas.microsoft.com/office/drawing/2014/main" xmlns="" id="{D052F5BC-98E0-4D60-AD67-9547738B7DD4}"/>
               </a:ext>
             </a:extLst>
           </p:cNvPr>
@@ -2060,7 +2060,7 @@
           <p:cNvPr id="12" name="Slide Number Placeholder 11">
             <a:extLst>
               <a:ext uri="{FF2B5EF4-FFF2-40B4-BE49-F238E27FC236}">
-                <a16:creationId xmlns:a16="http://schemas.microsoft.com/office/drawing/2014/main" id="{A38552DC-952E-41EA-AAAF-C2187523C0B0}"/>
+                <a16:creationId xmlns:a16="http://schemas.microsoft.com/office/drawing/2014/main" xmlns="" id="{A38552DC-952E-41EA-AAAF-C2187523C0B0}"/>
               </a:ext>
             </a:extLst>
           </p:cNvPr>
@@ -2142,7 +2142,7 @@
           <p:cNvPr id="6" name="Date Placeholder 5">
             <a:extLst>
               <a:ext uri="{FF2B5EF4-FFF2-40B4-BE49-F238E27FC236}">
-                <a16:creationId xmlns:a16="http://schemas.microsoft.com/office/drawing/2014/main" id="{7392073F-158F-44A3-8913-917AFFC1BC20}"/>
+                <a16:creationId xmlns:a16="http://schemas.microsoft.com/office/drawing/2014/main" xmlns="" id="{7392073F-158F-44A3-8913-917AFFC1BC20}"/>
               </a:ext>
             </a:extLst>
           </p:cNvPr>
@@ -2160,7 +2160,7 @@
           <a:p>
             <a:fld id="{1775B394-D9F9-4F0C-B15D-605F45CB9E9F}" type="datetime1">
               <a:rPr lang="en-US" smtClean="0"/>
-              <a:t>4/21/2026</a:t>
+              <a:t>4/22/2026</a:t>
             </a:fld>
             <a:endParaRPr lang="en-US" dirty="0"/>
           </a:p>
@@ -2171,7 +2171,7 @@
           <p:cNvPr id="7" name="Footer Placeholder 6">
             <a:extLst>
               <a:ext uri="{FF2B5EF4-FFF2-40B4-BE49-F238E27FC236}">
-                <a16:creationId xmlns:a16="http://schemas.microsoft.com/office/drawing/2014/main" id="{EED72207-24CA-42B7-A975-2F8E41CBA904}"/>
+                <a16:creationId xmlns:a16="http://schemas.microsoft.com/office/drawing/2014/main" xmlns="" id="{EED72207-24CA-42B7-A975-2F8E41CBA904}"/>
               </a:ext>
             </a:extLst>
           </p:cNvPr>
@@ -2196,7 +2196,7 @@
           <p:cNvPr id="8" name="Slide Number Placeholder 7">
             <a:extLst>
               <a:ext uri="{FF2B5EF4-FFF2-40B4-BE49-F238E27FC236}">
-                <a16:creationId xmlns:a16="http://schemas.microsoft.com/office/drawing/2014/main" id="{D01080F2-251A-4B88-9A62-16F46D724F83}"/>
+                <a16:creationId xmlns:a16="http://schemas.microsoft.com/office/drawing/2014/main" xmlns="" id="{D01080F2-251A-4B88-9A62-16F46D724F83}"/>
               </a:ext>
             </a:extLst>
           </p:cNvPr>
@@ -2255,7 +2255,7 @@
           <p:cNvPr id="10" name="Rectangle 9">
             <a:extLst>
               <a:ext uri="{FF2B5EF4-FFF2-40B4-BE49-F238E27FC236}">
-                <a16:creationId xmlns:a16="http://schemas.microsoft.com/office/drawing/2014/main" id="{A8E9C91B-7EAD-4562-AB0E-DFB9663AECE3}"/>
+                <a16:creationId xmlns:a16="http://schemas.microsoft.com/office/drawing/2014/main" xmlns="" id="{A8E9C91B-7EAD-4562-AB0E-DFB9663AECE3}"/>
               </a:ext>
             </a:extLst>
           </p:cNvPr>
@@ -2299,7 +2299,7 @@
           <p:cNvPr id="2" name="Date Placeholder 1">
             <a:extLst>
               <a:ext uri="{FF2B5EF4-FFF2-40B4-BE49-F238E27FC236}">
-                <a16:creationId xmlns:a16="http://schemas.microsoft.com/office/drawing/2014/main" id="{94E9223F-721F-47BF-9FD5-0F8D12FF0DE1}"/>
+                <a16:creationId xmlns:a16="http://schemas.microsoft.com/office/drawing/2014/main" xmlns="" id="{94E9223F-721F-47BF-9FD5-0F8D12FF0DE1}"/>
               </a:ext>
             </a:extLst>
           </p:cNvPr>
@@ -2317,7 +2317,7 @@
           <a:p>
             <a:fld id="{39667345-2558-425A-8533-9BFDBCE15005}" type="datetime1">
               <a:rPr lang="en-US" smtClean="0"/>
-              <a:t>4/21/2026</a:t>
+              <a:t>4/22/2026</a:t>
             </a:fld>
             <a:endParaRPr lang="en-US" dirty="0"/>
           </a:p>
@@ -2328,7 +2328,7 @@
           <p:cNvPr id="3" name="Footer Placeholder 2">
             <a:extLst>
               <a:ext uri="{FF2B5EF4-FFF2-40B4-BE49-F238E27FC236}">
-                <a16:creationId xmlns:a16="http://schemas.microsoft.com/office/drawing/2014/main" id="{05915714-6BBA-4593-8591-4E26F7D58D9F}"/>
+                <a16:creationId xmlns:a16="http://schemas.microsoft.com/office/drawing/2014/main" xmlns="" id="{05915714-6BBA-4593-8591-4E26F7D58D9F}"/>
               </a:ext>
             </a:extLst>
           </p:cNvPr>
@@ -2353,7 +2353,7 @@
           <p:cNvPr id="4" name="Slide Number Placeholder 3">
             <a:extLst>
               <a:ext uri="{FF2B5EF4-FFF2-40B4-BE49-F238E27FC236}">
-                <a16:creationId xmlns:a16="http://schemas.microsoft.com/office/drawing/2014/main" id="{BE06F857-D2E1-44DD-ABDD-EBB739645B67}"/>
+                <a16:creationId xmlns:a16="http://schemas.microsoft.com/office/drawing/2014/main" xmlns="" id="{BE06F857-D2E1-44DD-ABDD-EBB739645B67}"/>
               </a:ext>
             </a:extLst>
           </p:cNvPr>
@@ -2412,7 +2412,7 @@
           <p:cNvPr id="8" name="Rectangle 7">
             <a:extLst>
               <a:ext uri="{FF2B5EF4-FFF2-40B4-BE49-F238E27FC236}">
-                <a16:creationId xmlns:a16="http://schemas.microsoft.com/office/drawing/2014/main" id="{16D90D66-BCB9-4229-A829-628874352AC0}"/>
+                <a16:creationId xmlns:a16="http://schemas.microsoft.com/office/drawing/2014/main" xmlns="" id="{16D90D66-BCB9-4229-A829-628874352AC0}"/>
               </a:ext>
             </a:extLst>
           </p:cNvPr>
@@ -2646,7 +2646,7 @@
           <a:p>
             <a:fld id="{92BEA474-078D-4E9B-9B14-09A87B19DC46}" type="datetime1">
               <a:rPr lang="en-US" smtClean="0"/>
-              <a:t>4/21/2026</a:t>
+              <a:t>4/22/2026</a:t>
             </a:fld>
             <a:endParaRPr lang="en-US" dirty="0"/>
           </a:p>
@@ -2751,7 +2751,7 @@
           <p:cNvPr id="8" name="Rectangle 7">
             <a:extLst>
               <a:ext uri="{FF2B5EF4-FFF2-40B4-BE49-F238E27FC236}">
-                <a16:creationId xmlns:a16="http://schemas.microsoft.com/office/drawing/2014/main" id="{DA134939-39C0-4522-A125-A13DFDA66490}"/>
+                <a16:creationId xmlns:a16="http://schemas.microsoft.com/office/drawing/2014/main" xmlns="" id="{DA134939-39C0-4522-A125-A13DFDA66490}"/>
               </a:ext>
             </a:extLst>
           </p:cNvPr>
@@ -2996,7 +2996,7 @@
           <a:p>
             <a:fld id="{4907D986-8816-4272-A432-0437A28A9828}" type="datetime1">
               <a:rPr lang="en-US" smtClean="0"/>
-              <a:t>4/21/2026</a:t>
+              <a:t>4/22/2026</a:t>
             </a:fld>
             <a:endParaRPr lang="en-US" dirty="0"/>
           </a:p>
@@ -3090,7 +3090,7 @@
           <p:cNvPr id="7" name="Rectangle 6">
             <a:extLst>
               <a:ext uri="{FF2B5EF4-FFF2-40B4-BE49-F238E27FC236}">
-                <a16:creationId xmlns:a16="http://schemas.microsoft.com/office/drawing/2014/main" id="{416A0E3C-60E6-4F39-BC55-5F7C224E1F7C}"/>
+                <a16:creationId xmlns:a16="http://schemas.microsoft.com/office/drawing/2014/main" xmlns="" id="{416A0E3C-60E6-4F39-BC55-5F7C224E1F7C}"/>
               </a:ext>
             </a:extLst>
           </p:cNvPr>
@@ -3257,7 +3257,7 @@
           <a:p>
             <a:fld id="{62D6E202-B606-4609-B914-27C9371A1F6D}" type="datetime1">
               <a:rPr lang="en-US" smtClean="0"/>
-              <a:t>4/21/2026</a:t>
+              <a:t>4/22/2026</a:t>
             </a:fld>
             <a:endParaRPr lang="en-US" dirty="0"/>
           </a:p>
@@ -3342,7 +3342,7 @@
           <p:cNvPr id="10" name="Straight Connector 9">
             <a:extLst>
               <a:ext uri="{FF2B5EF4-FFF2-40B4-BE49-F238E27FC236}">
-                <a16:creationId xmlns:a16="http://schemas.microsoft.com/office/drawing/2014/main" id="{C5025DAC-8B93-4160-B017-3A274A5828C0}"/>
+                <a16:creationId xmlns:a16="http://schemas.microsoft.com/office/drawing/2014/main" xmlns="" id="{C5025DAC-8B93-4160-B017-3A274A5828C0}"/>
               </a:ext>
             </a:extLst>
           </p:cNvPr>
@@ -3764,7 +3764,7 @@
 </file>
 
 <file path=ppt/slides/slide1.xml><?xml version="1.0" encoding="utf-8"?>
-<p:sld xmlns:a="http://schemas.openxmlformats.org/drawingml/2006/main" xmlns:p="http://schemas.openxmlformats.org/presentationml/2006/main" xmlns:r="http://schemas.openxmlformats.org/officeDocument/2006/relationships">
+<p:sld xmlns:a="http://schemas.openxmlformats.org/drawingml/2006/main" xmlns:r="http://schemas.openxmlformats.org/officeDocument/2006/relationships" xmlns:p="http://schemas.openxmlformats.org/presentationml/2006/main">
   <p:cSld>
     <p:spTree>
       <p:nvGrpSpPr>
@@ -3772,7 +3772,14 @@
         <p:cNvGrpSpPr/>
         <p:nvPr/>
       </p:nvGrpSpPr>
-      <p:grpSpPr/>
+      <p:grpSpPr>
+        <a:xfrm>
+          <a:off x="0" y="0"/>
+          <a:ext cx="0" cy="0"/>
+          <a:chOff x="0" y="0"/>
+          <a:chExt cx="0" cy="0"/>
+        </a:xfrm>
+      </p:grpSpPr>
       <p:sp>
         <p:nvSpPr>
           <p:cNvPr id="2" name="Title 1"/>
@@ -3789,7 +3796,7 @@
           <a:lstStyle/>
           <a:p>
             <a:r>
-              <a:rPr b="1" sz="4800">
+              <a:rPr sz="4800" b="1">
                 <a:solidFill>
                   <a:srgbClr val="2F3338"/>
                 </a:solidFill>
@@ -3869,7 +3876,7 @@
 </file>
 
 <file path=ppt/slides/slide10.xml><?xml version="1.0" encoding="utf-8"?>
-<p:sld xmlns:a="http://schemas.openxmlformats.org/drawingml/2006/main" xmlns:p="http://schemas.openxmlformats.org/presentationml/2006/main" xmlns:r="http://schemas.openxmlformats.org/officeDocument/2006/relationships">
+<p:sld xmlns:a="http://schemas.openxmlformats.org/drawingml/2006/main" xmlns:r="http://schemas.openxmlformats.org/officeDocument/2006/relationships" xmlns:p="http://schemas.openxmlformats.org/presentationml/2006/main">
   <p:cSld>
     <p:spTree>
       <p:nvGrpSpPr>
@@ -3877,7 +3884,14 @@
         <p:cNvGrpSpPr/>
         <p:nvPr/>
       </p:nvGrpSpPr>
-      <p:grpSpPr/>
+      <p:grpSpPr>
+        <a:xfrm>
+          <a:off x="0" y="0"/>
+          <a:ext cx="0" cy="0"/>
+          <a:chOff x="0" y="0"/>
+          <a:chExt cx="0" cy="0"/>
+        </a:xfrm>
+      </p:grpSpPr>
       <p:sp>
         <p:nvSpPr>
           <p:cNvPr id="2" name="Title 1"/>
@@ -3894,7 +3908,7 @@
           <a:lstStyle/>
           <a:p>
             <a:r>
-              <a:rPr b="1" sz="3500">
+              <a:rPr sz="3500" b="1">
                 <a:solidFill>
                   <a:srgbClr val="2F3338"/>
                 </a:solidFill>
@@ -3947,6 +3961,7 @@
           <a:lstStyle/>
           <a:p>
             <a:pPr algn="ctr"/>
+            <a:endParaRPr/>
           </a:p>
         </p:txBody>
       </p:sp>
@@ -4072,6 +4087,7 @@
           <a:lstStyle/>
           <a:p>
             <a:pPr algn="ctr"/>
+            <a:endParaRPr/>
           </a:p>
         </p:txBody>
       </p:sp>
@@ -4201,6 +4217,7 @@
           <a:lstStyle/>
           <a:p>
             <a:pPr algn="ctr"/>
+            <a:endParaRPr/>
           </a:p>
         </p:txBody>
       </p:sp>
@@ -4255,7 +4272,7 @@
 </file>
 
 <file path=ppt/slides/slide11.xml><?xml version="1.0" encoding="utf-8"?>
-<p:sld xmlns:a="http://schemas.openxmlformats.org/drawingml/2006/main" xmlns:p="http://schemas.openxmlformats.org/presentationml/2006/main" xmlns:r="http://schemas.openxmlformats.org/officeDocument/2006/relationships">
+<p:sld xmlns:a="http://schemas.openxmlformats.org/drawingml/2006/main" xmlns:r="http://schemas.openxmlformats.org/officeDocument/2006/relationships" xmlns:p="http://schemas.openxmlformats.org/presentationml/2006/main">
   <p:cSld>
     <p:spTree>
       <p:nvGrpSpPr>
@@ -4263,7 +4280,14 @@
         <p:cNvGrpSpPr/>
         <p:nvPr/>
       </p:nvGrpSpPr>
-      <p:grpSpPr/>
+      <p:grpSpPr>
+        <a:xfrm>
+          <a:off x="0" y="0"/>
+          <a:ext cx="0" cy="0"/>
+          <a:chOff x="0" y="0"/>
+          <a:chExt cx="0" cy="0"/>
+        </a:xfrm>
+      </p:grpSpPr>
       <p:sp>
         <p:nvSpPr>
           <p:cNvPr id="2" name="Title 1"/>
@@ -4280,7 +4304,7 @@
           <a:lstStyle/>
           <a:p>
             <a:r>
-              <a:rPr b="1" sz="3500">
+              <a:rPr sz="3500" b="1">
                 <a:solidFill>
                   <a:srgbClr val="2F3338"/>
                 </a:solidFill>
@@ -4394,6 +4418,7 @@
           <a:lstStyle/>
           <a:p>
             <a:pPr algn="ctr"/>
+            <a:endParaRPr/>
           </a:p>
         </p:txBody>
       </p:sp>
@@ -4622,6 +4647,7 @@
           <a:lstStyle/>
           <a:p>
             <a:pPr algn="ctr"/>
+            <a:endParaRPr/>
           </a:p>
         </p:txBody>
       </p:sp>
@@ -4676,7 +4702,7 @@
 </file>
 
 <file path=ppt/slides/slide12.xml><?xml version="1.0" encoding="utf-8"?>
-<p:sld xmlns:a="http://schemas.openxmlformats.org/drawingml/2006/main" xmlns:p="http://schemas.openxmlformats.org/presentationml/2006/main" xmlns:r="http://schemas.openxmlformats.org/officeDocument/2006/relationships">
+<p:sld xmlns:a="http://schemas.openxmlformats.org/drawingml/2006/main" xmlns:r="http://schemas.openxmlformats.org/officeDocument/2006/relationships" xmlns:p="http://schemas.openxmlformats.org/presentationml/2006/main">
   <p:cSld>
     <p:spTree>
       <p:nvGrpSpPr>
@@ -4684,7 +4710,14 @@
         <p:cNvGrpSpPr/>
         <p:nvPr/>
       </p:nvGrpSpPr>
-      <p:grpSpPr/>
+      <p:grpSpPr>
+        <a:xfrm>
+          <a:off x="0" y="0"/>
+          <a:ext cx="0" cy="0"/>
+          <a:chOff x="0" y="0"/>
+          <a:chExt cx="0" cy="0"/>
+        </a:xfrm>
+      </p:grpSpPr>
       <p:sp>
         <p:nvSpPr>
           <p:cNvPr id="2" name="Title 1"/>
@@ -4701,7 +4734,7 @@
           <a:lstStyle/>
           <a:p>
             <a:r>
-              <a:rPr b="1" sz="3500">
+              <a:rPr sz="3500" b="1">
                 <a:solidFill>
                   <a:srgbClr val="2F3338"/>
                 </a:solidFill>
@@ -4754,6 +4787,7 @@
           <a:lstStyle/>
           <a:p>
             <a:pPr algn="ctr"/>
+            <a:endParaRPr/>
           </a:p>
         </p:txBody>
       </p:sp>
@@ -4860,6 +4894,7 @@
           <a:lstStyle/>
           <a:p>
             <a:pPr algn="ctr"/>
+            <a:endParaRPr/>
           </a:p>
         </p:txBody>
       </p:sp>
@@ -5069,6 +5104,7 @@
           <a:lstStyle/>
           <a:p>
             <a:pPr algn="ctr"/>
+            <a:endParaRPr/>
           </a:p>
         </p:txBody>
       </p:sp>
@@ -5123,7 +5159,7 @@
 </file>
 
 <file path=ppt/slides/slide13.xml><?xml version="1.0" encoding="utf-8"?>
-<p:sld xmlns:a="http://schemas.openxmlformats.org/drawingml/2006/main" xmlns:p="http://schemas.openxmlformats.org/presentationml/2006/main" xmlns:r="http://schemas.openxmlformats.org/officeDocument/2006/relationships">
+<p:sld xmlns:a="http://schemas.openxmlformats.org/drawingml/2006/main" xmlns:r="http://schemas.openxmlformats.org/officeDocument/2006/relationships" xmlns:p="http://schemas.openxmlformats.org/presentationml/2006/main">
   <p:cSld>
     <p:spTree>
       <p:nvGrpSpPr>
@@ -5131,7 +5167,14 @@
         <p:cNvGrpSpPr/>
         <p:nvPr/>
       </p:nvGrpSpPr>
-      <p:grpSpPr/>
+      <p:grpSpPr>
+        <a:xfrm>
+          <a:off x="0" y="0"/>
+          <a:ext cx="0" cy="0"/>
+          <a:chOff x="0" y="0"/>
+          <a:chExt cx="0" cy="0"/>
+        </a:xfrm>
+      </p:grpSpPr>
       <p:sp>
         <p:nvSpPr>
           <p:cNvPr id="2" name="Title 1"/>
@@ -5148,7 +5191,7 @@
           <a:lstStyle/>
           <a:p>
             <a:r>
-              <a:rPr b="1" sz="3500">
+              <a:rPr sz="3500" b="1">
                 <a:solidFill>
                   <a:srgbClr val="2F3338"/>
                 </a:solidFill>
@@ -5243,6 +5286,7 @@
           <a:lstStyle/>
           <a:p>
             <a:pPr algn="ctr"/>
+            <a:endParaRPr/>
           </a:p>
         </p:txBody>
       </p:sp>
@@ -5429,6 +5473,7 @@
           <a:lstStyle/>
           <a:p>
             <a:pPr algn="ctr"/>
+            <a:endParaRPr/>
           </a:p>
         </p:txBody>
       </p:sp>
@@ -5516,6 +5561,7 @@
           <a:lstStyle/>
           <a:p>
             <a:pPr algn="ctr"/>
+            <a:endParaRPr/>
           </a:p>
         </p:txBody>
       </p:sp>
@@ -5664,6 +5710,7 @@
           <a:lstStyle/>
           <a:p>
             <a:pPr algn="ctr"/>
+            <a:endParaRPr/>
           </a:p>
         </p:txBody>
       </p:sp>
@@ -5718,7 +5765,7 @@
 </file>
 
 <file path=ppt/slides/slide14.xml><?xml version="1.0" encoding="utf-8"?>
-<p:sld xmlns:a="http://schemas.openxmlformats.org/drawingml/2006/main" xmlns:p="http://schemas.openxmlformats.org/presentationml/2006/main" xmlns:r="http://schemas.openxmlformats.org/officeDocument/2006/relationships">
+<p:sld xmlns:a="http://schemas.openxmlformats.org/drawingml/2006/main" xmlns:r="http://schemas.openxmlformats.org/officeDocument/2006/relationships" xmlns:p="http://schemas.openxmlformats.org/presentationml/2006/main">
   <p:cSld>
     <p:spTree>
       <p:nvGrpSpPr>
@@ -5726,7 +5773,14 @@
         <p:cNvGrpSpPr/>
         <p:nvPr/>
       </p:nvGrpSpPr>
-      <p:grpSpPr/>
+      <p:grpSpPr>
+        <a:xfrm>
+          <a:off x="0" y="0"/>
+          <a:ext cx="0" cy="0"/>
+          <a:chOff x="0" y="0"/>
+          <a:chExt cx="0" cy="0"/>
+        </a:xfrm>
+      </p:grpSpPr>
       <p:sp>
         <p:nvSpPr>
           <p:cNvPr id="2" name="Title 1"/>
@@ -5743,7 +5797,7 @@
           <a:lstStyle/>
           <a:p>
             <a:r>
-              <a:rPr b="1" sz="3500">
+              <a:rPr sz="3500" b="1">
                 <a:solidFill>
                   <a:srgbClr val="2F3338"/>
                 </a:solidFill>
@@ -5796,6 +5850,7 @@
           <a:lstStyle/>
           <a:p>
             <a:pPr algn="ctr"/>
+            <a:endParaRPr/>
           </a:p>
         </p:txBody>
       </p:sp>
@@ -5841,6 +5896,7 @@
           <a:lstStyle/>
           <a:p>
             <a:pPr algn="ctr"/>
+            <a:endParaRPr/>
           </a:p>
         </p:txBody>
       </p:sp>
@@ -6088,6 +6144,7 @@
           <a:lstStyle/>
           <a:p>
             <a:pPr algn="ctr"/>
+            <a:endParaRPr/>
           </a:p>
         </p:txBody>
       </p:sp>
@@ -6142,7 +6199,7 @@
 </file>
 
 <file path=ppt/slides/slide15.xml><?xml version="1.0" encoding="utf-8"?>
-<p:sld xmlns:a="http://schemas.openxmlformats.org/drawingml/2006/main" xmlns:p="http://schemas.openxmlformats.org/presentationml/2006/main" xmlns:r="http://schemas.openxmlformats.org/officeDocument/2006/relationships">
+<p:sld xmlns:a="http://schemas.openxmlformats.org/drawingml/2006/main" xmlns:r="http://schemas.openxmlformats.org/officeDocument/2006/relationships" xmlns:p="http://schemas.openxmlformats.org/presentationml/2006/main">
   <p:cSld>
     <p:spTree>
       <p:nvGrpSpPr>
@@ -6150,7 +6207,14 @@
         <p:cNvGrpSpPr/>
         <p:nvPr/>
       </p:nvGrpSpPr>
-      <p:grpSpPr/>
+      <p:grpSpPr>
+        <a:xfrm>
+          <a:off x="0" y="0"/>
+          <a:ext cx="0" cy="0"/>
+          <a:chOff x="0" y="0"/>
+          <a:chExt cx="0" cy="0"/>
+        </a:xfrm>
+      </p:grpSpPr>
       <p:sp>
         <p:nvSpPr>
           <p:cNvPr id="2" name="Title 1"/>
@@ -6167,7 +6231,7 @@
           <a:lstStyle/>
           <a:p>
             <a:r>
-              <a:rPr b="1" sz="3500">
+              <a:rPr sz="3500" b="1">
                 <a:solidFill>
                   <a:srgbClr val="2F3338"/>
                 </a:solidFill>
@@ -6220,6 +6284,7 @@
           <a:lstStyle/>
           <a:p>
             <a:pPr algn="ctr"/>
+            <a:endParaRPr/>
           </a:p>
         </p:txBody>
       </p:sp>
@@ -6314,6 +6379,12 @@
                 <a:spcPts val="200"/>
               </a:spcAft>
             </a:pPr>
+            <a:endParaRPr sz="1200" b="0" i="0">
+              <a:solidFill>
+                <a:srgbClr val="D4D4D4"/>
+              </a:solidFill>
+              <a:latin typeface="Consolas"/>
+            </a:endParaRPr>
           </a:p>
           <a:p>
             <a:pPr algn="l">
@@ -6362,6 +6433,12 @@
                 <a:spcPts val="200"/>
               </a:spcAft>
             </a:pPr>
+            <a:endParaRPr sz="1200" b="0" i="0">
+              <a:solidFill>
+                <a:srgbClr val="D4D4D4"/>
+              </a:solidFill>
+              <a:latin typeface="Consolas"/>
+            </a:endParaRPr>
           </a:p>
           <a:p>
             <a:pPr algn="l">
@@ -6445,6 +6522,7 @@
           <a:lstStyle/>
           <a:p>
             <a:pPr algn="ctr"/>
+            <a:endParaRPr/>
           </a:p>
         </p:txBody>
       </p:sp>
@@ -6532,6 +6610,7 @@
           <a:lstStyle/>
           <a:p>
             <a:pPr algn="ctr"/>
+            <a:endParaRPr/>
           </a:p>
         </p:txBody>
       </p:sp>
@@ -6586,7 +6665,7 @@
 </file>
 
 <file path=ppt/slides/slide16.xml><?xml version="1.0" encoding="utf-8"?>
-<p:sld xmlns:a="http://schemas.openxmlformats.org/drawingml/2006/main" xmlns:p="http://schemas.openxmlformats.org/presentationml/2006/main" xmlns:r="http://schemas.openxmlformats.org/officeDocument/2006/relationships">
+<p:sld xmlns:a="http://schemas.openxmlformats.org/drawingml/2006/main" xmlns:r="http://schemas.openxmlformats.org/officeDocument/2006/relationships" xmlns:p="http://schemas.openxmlformats.org/presentationml/2006/main">
   <p:cSld>
     <p:spTree>
       <p:nvGrpSpPr>
@@ -6594,7 +6673,14 @@
         <p:cNvGrpSpPr/>
         <p:nvPr/>
       </p:nvGrpSpPr>
-      <p:grpSpPr/>
+      <p:grpSpPr>
+        <a:xfrm>
+          <a:off x="0" y="0"/>
+          <a:ext cx="0" cy="0"/>
+          <a:chOff x="0" y="0"/>
+          <a:chExt cx="0" cy="0"/>
+        </a:xfrm>
+      </p:grpSpPr>
       <p:sp>
         <p:nvSpPr>
           <p:cNvPr id="2" name="Title 1"/>
@@ -6611,7 +6697,7 @@
           <a:lstStyle/>
           <a:p>
             <a:r>
-              <a:rPr b="1" sz="3500">
+              <a:rPr sz="3500" b="1">
                 <a:solidFill>
                   <a:srgbClr val="2F3338"/>
                 </a:solidFill>
@@ -6664,6 +6750,7 @@
           <a:lstStyle/>
           <a:p>
             <a:pPr algn="ctr"/>
+            <a:endParaRPr/>
           </a:p>
         </p:txBody>
       </p:sp>
@@ -6709,6 +6796,7 @@
           <a:lstStyle/>
           <a:p>
             <a:pPr algn="ctr"/>
+            <a:endParaRPr/>
           </a:p>
         </p:txBody>
       </p:sp>
@@ -7017,6 +7105,7 @@
           <a:lstStyle/>
           <a:p>
             <a:pPr algn="ctr"/>
+            <a:endParaRPr/>
           </a:p>
         </p:txBody>
       </p:sp>
@@ -7071,7 +7160,7 @@
 </file>
 
 <file path=ppt/slides/slide17.xml><?xml version="1.0" encoding="utf-8"?>
-<p:sld xmlns:a="http://schemas.openxmlformats.org/drawingml/2006/main" xmlns:p="http://schemas.openxmlformats.org/presentationml/2006/main" xmlns:r="http://schemas.openxmlformats.org/officeDocument/2006/relationships">
+<p:sld xmlns:a="http://schemas.openxmlformats.org/drawingml/2006/main" xmlns:r="http://schemas.openxmlformats.org/officeDocument/2006/relationships" xmlns:p="http://schemas.openxmlformats.org/presentationml/2006/main">
   <p:cSld>
     <p:spTree>
       <p:nvGrpSpPr>
@@ -7079,7 +7168,14 @@
         <p:cNvGrpSpPr/>
         <p:nvPr/>
       </p:nvGrpSpPr>
-      <p:grpSpPr/>
+      <p:grpSpPr>
+        <a:xfrm>
+          <a:off x="0" y="0"/>
+          <a:ext cx="0" cy="0"/>
+          <a:chOff x="0" y="0"/>
+          <a:chExt cx="0" cy="0"/>
+        </a:xfrm>
+      </p:grpSpPr>
       <p:sp>
         <p:nvSpPr>
           <p:cNvPr id="2" name="Title 1"/>
@@ -7096,7 +7192,7 @@
           <a:lstStyle/>
           <a:p>
             <a:r>
-              <a:rPr b="1" sz="3500">
+              <a:rPr sz="3500" b="1">
                 <a:solidFill>
                   <a:srgbClr val="2F3338"/>
                 </a:solidFill>
@@ -7149,6 +7245,7 @@
           <a:lstStyle/>
           <a:p>
             <a:pPr algn="ctr"/>
+            <a:endParaRPr/>
           </a:p>
         </p:txBody>
       </p:sp>
@@ -7194,6 +7291,7 @@
           <a:lstStyle/>
           <a:p>
             <a:pPr algn="ctr"/>
+            <a:endParaRPr/>
           </a:p>
         </p:txBody>
       </p:sp>
@@ -7281,6 +7379,7 @@
           <a:lstStyle/>
           <a:p>
             <a:pPr algn="ctr"/>
+            <a:endParaRPr/>
           </a:p>
         </p:txBody>
       </p:sp>
@@ -7608,6 +7707,7 @@
           <a:lstStyle/>
           <a:p>
             <a:pPr algn="ctr"/>
+            <a:endParaRPr/>
           </a:p>
         </p:txBody>
       </p:sp>
@@ -7662,7 +7762,7 @@
 </file>
 
 <file path=ppt/slides/slide18.xml><?xml version="1.0" encoding="utf-8"?>
-<p:sld xmlns:a="http://schemas.openxmlformats.org/drawingml/2006/main" xmlns:p="http://schemas.openxmlformats.org/presentationml/2006/main" xmlns:r="http://schemas.openxmlformats.org/officeDocument/2006/relationships">
+<p:sld xmlns:a="http://schemas.openxmlformats.org/drawingml/2006/main" xmlns:r="http://schemas.openxmlformats.org/officeDocument/2006/relationships" xmlns:p="http://schemas.openxmlformats.org/presentationml/2006/main">
   <p:cSld>
     <p:spTree>
       <p:nvGrpSpPr>
@@ -7670,7 +7770,14 @@
         <p:cNvGrpSpPr/>
         <p:nvPr/>
       </p:nvGrpSpPr>
-      <p:grpSpPr/>
+      <p:grpSpPr>
+        <a:xfrm>
+          <a:off x="0" y="0"/>
+          <a:ext cx="0" cy="0"/>
+          <a:chOff x="0" y="0"/>
+          <a:chExt cx="0" cy="0"/>
+        </a:xfrm>
+      </p:grpSpPr>
       <p:sp>
         <p:nvSpPr>
           <p:cNvPr id="2" name="Title 1"/>
@@ -7687,7 +7794,7 @@
           <a:lstStyle/>
           <a:p>
             <a:r>
-              <a:rPr b="1" sz="3500">
+              <a:rPr sz="3500" b="1">
                 <a:solidFill>
                   <a:srgbClr val="2F3338"/>
                 </a:solidFill>
@@ -7740,6 +7847,7 @@
           <a:lstStyle/>
           <a:p>
             <a:pPr algn="ctr"/>
+            <a:endParaRPr/>
           </a:p>
         </p:txBody>
       </p:sp>
@@ -8029,6 +8137,7 @@
           <a:lstStyle/>
           <a:p>
             <a:pPr algn="ctr"/>
+            <a:endParaRPr/>
           </a:p>
         </p:txBody>
       </p:sp>
@@ -8083,7 +8192,7 @@
 </file>
 
 <file path=ppt/slides/slide19.xml><?xml version="1.0" encoding="utf-8"?>
-<p:sld xmlns:a="http://schemas.openxmlformats.org/drawingml/2006/main" xmlns:p="http://schemas.openxmlformats.org/presentationml/2006/main" xmlns:r="http://schemas.openxmlformats.org/officeDocument/2006/relationships">
+<p:sld xmlns:a="http://schemas.openxmlformats.org/drawingml/2006/main" xmlns:r="http://schemas.openxmlformats.org/officeDocument/2006/relationships" xmlns:p="http://schemas.openxmlformats.org/presentationml/2006/main">
   <p:cSld>
     <p:spTree>
       <p:nvGrpSpPr>
@@ -8091,7 +8200,14 @@
         <p:cNvGrpSpPr/>
         <p:nvPr/>
       </p:nvGrpSpPr>
-      <p:grpSpPr/>
+      <p:grpSpPr>
+        <a:xfrm>
+          <a:off x="0" y="0"/>
+          <a:ext cx="0" cy="0"/>
+          <a:chOff x="0" y="0"/>
+          <a:chExt cx="0" cy="0"/>
+        </a:xfrm>
+      </p:grpSpPr>
       <p:sp>
         <p:nvSpPr>
           <p:cNvPr id="2" name="Title 1"/>
@@ -8108,7 +8224,7 @@
           <a:lstStyle/>
           <a:p>
             <a:r>
-              <a:rPr b="1" sz="3500">
+              <a:rPr sz="3500" b="1">
                 <a:solidFill>
                   <a:srgbClr val="2F3338"/>
                 </a:solidFill>
@@ -8161,6 +8277,7 @@
           <a:lstStyle/>
           <a:p>
             <a:pPr algn="ctr"/>
+            <a:endParaRPr/>
           </a:p>
         </p:txBody>
       </p:sp>
@@ -8206,6 +8323,7 @@
           <a:lstStyle/>
           <a:p>
             <a:pPr algn="ctr"/>
+            <a:endParaRPr/>
           </a:p>
         </p:txBody>
       </p:sp>
@@ -8293,6 +8411,7 @@
           <a:lstStyle/>
           <a:p>
             <a:pPr algn="ctr"/>
+            <a:endParaRPr/>
           </a:p>
         </p:txBody>
       </p:sp>
@@ -8406,6 +8525,12 @@
                 <a:spcPts val="200"/>
               </a:spcAft>
             </a:pPr>
+            <a:endParaRPr sz="1150" b="0" i="0">
+              <a:solidFill>
+                <a:srgbClr val="D4D4D4"/>
+              </a:solidFill>
+              <a:latin typeface="Consolas"/>
+            </a:endParaRPr>
           </a:p>
           <a:p>
             <a:pPr algn="l">
@@ -8435,6 +8560,12 @@
                 <a:spcPts val="200"/>
               </a:spcAft>
             </a:pPr>
+            <a:endParaRPr sz="1150" b="0" i="0">
+              <a:solidFill>
+                <a:srgbClr val="D4D4D4"/>
+              </a:solidFill>
+              <a:latin typeface="Consolas"/>
+            </a:endParaRPr>
           </a:p>
           <a:p>
             <a:pPr algn="l">
@@ -8560,6 +8691,7 @@
           <a:lstStyle/>
           <a:p>
             <a:pPr algn="ctr"/>
+            <a:endParaRPr/>
           </a:p>
         </p:txBody>
       </p:sp>
@@ -8803,6 +8935,7 @@
           <a:lstStyle/>
           <a:p>
             <a:pPr algn="ctr"/>
+            <a:endParaRPr/>
           </a:p>
         </p:txBody>
       </p:sp>
@@ -8857,7 +8990,7 @@
 </file>
 
 <file path=ppt/slides/slide2.xml><?xml version="1.0" encoding="utf-8"?>
-<p:sld xmlns:a="http://schemas.openxmlformats.org/drawingml/2006/main" xmlns:p="http://schemas.openxmlformats.org/presentationml/2006/main" xmlns:r="http://schemas.openxmlformats.org/officeDocument/2006/relationships">
+<p:sld xmlns:a="http://schemas.openxmlformats.org/drawingml/2006/main" xmlns:r="http://schemas.openxmlformats.org/officeDocument/2006/relationships" xmlns:p="http://schemas.openxmlformats.org/presentationml/2006/main">
   <p:cSld>
     <p:spTree>
       <p:nvGrpSpPr>
@@ -8865,7 +8998,14 @@
         <p:cNvGrpSpPr/>
         <p:nvPr/>
       </p:nvGrpSpPr>
-      <p:grpSpPr/>
+      <p:grpSpPr>
+        <a:xfrm>
+          <a:off x="0" y="0"/>
+          <a:ext cx="0" cy="0"/>
+          <a:chOff x="0" y="0"/>
+          <a:chExt cx="0" cy="0"/>
+        </a:xfrm>
+      </p:grpSpPr>
       <p:sp>
         <p:nvSpPr>
           <p:cNvPr id="2" name="Title 1"/>
@@ -8882,7 +9022,7 @@
           <a:lstStyle/>
           <a:p>
             <a:r>
-              <a:rPr b="1" sz="3500">
+              <a:rPr sz="3500" b="1">
                 <a:solidFill>
                   <a:srgbClr val="2F3338"/>
                 </a:solidFill>
@@ -8935,6 +9075,7 @@
           <a:lstStyle/>
           <a:p>
             <a:pPr algn="ctr"/>
+            <a:endParaRPr/>
           </a:p>
         </p:txBody>
       </p:sp>
@@ -9117,6 +9258,7 @@
           <a:lstStyle/>
           <a:p>
             <a:pPr algn="ctr"/>
+            <a:endParaRPr/>
           </a:p>
         </p:txBody>
       </p:sp>
@@ -9171,7 +9313,7 @@
 </file>
 
 <file path=ppt/slides/slide20.xml><?xml version="1.0" encoding="utf-8"?>
-<p:sld xmlns:a="http://schemas.openxmlformats.org/drawingml/2006/main" xmlns:p="http://schemas.openxmlformats.org/presentationml/2006/main" xmlns:r="http://schemas.openxmlformats.org/officeDocument/2006/relationships">
+<p:sld xmlns:a="http://schemas.openxmlformats.org/drawingml/2006/main" xmlns:r="http://schemas.openxmlformats.org/officeDocument/2006/relationships" xmlns:p="http://schemas.openxmlformats.org/presentationml/2006/main">
   <p:cSld>
     <p:spTree>
       <p:nvGrpSpPr>
@@ -9179,7 +9321,14 @@
         <p:cNvGrpSpPr/>
         <p:nvPr/>
       </p:nvGrpSpPr>
-      <p:grpSpPr/>
+      <p:grpSpPr>
+        <a:xfrm>
+          <a:off x="0" y="0"/>
+          <a:ext cx="0" cy="0"/>
+          <a:chOff x="0" y="0"/>
+          <a:chExt cx="0" cy="0"/>
+        </a:xfrm>
+      </p:grpSpPr>
       <p:sp>
         <p:nvSpPr>
           <p:cNvPr id="2" name="Title 1"/>
@@ -9196,7 +9345,7 @@
           <a:lstStyle/>
           <a:p>
             <a:r>
-              <a:rPr b="1" sz="3500">
+              <a:rPr sz="3500" b="1">
                 <a:solidFill>
                   <a:srgbClr val="2F3338"/>
                 </a:solidFill>
@@ -9249,6 +9398,7 @@
           <a:lstStyle/>
           <a:p>
             <a:pPr algn="ctr"/>
+            <a:endParaRPr/>
           </a:p>
         </p:txBody>
       </p:sp>
@@ -9454,6 +9604,7 @@
           <a:lstStyle/>
           <a:p>
             <a:pPr algn="ctr"/>
+            <a:endParaRPr/>
           </a:p>
         </p:txBody>
       </p:sp>
@@ -9621,6 +9772,7 @@
           <a:lstStyle/>
           <a:p>
             <a:pPr algn="ctr"/>
+            <a:endParaRPr/>
           </a:p>
         </p:txBody>
       </p:sp>
@@ -9675,7 +9827,7 @@
 </file>
 
 <file path=ppt/slides/slide21.xml><?xml version="1.0" encoding="utf-8"?>
-<p:sld xmlns:a="http://schemas.openxmlformats.org/drawingml/2006/main" xmlns:p="http://schemas.openxmlformats.org/presentationml/2006/main" xmlns:r="http://schemas.openxmlformats.org/officeDocument/2006/relationships">
+<p:sld xmlns:a="http://schemas.openxmlformats.org/drawingml/2006/main" xmlns:r="http://schemas.openxmlformats.org/officeDocument/2006/relationships" xmlns:p="http://schemas.openxmlformats.org/presentationml/2006/main">
   <p:cSld>
     <p:spTree>
       <p:nvGrpSpPr>
@@ -9683,7 +9835,14 @@
         <p:cNvGrpSpPr/>
         <p:nvPr/>
       </p:nvGrpSpPr>
-      <p:grpSpPr/>
+      <p:grpSpPr>
+        <a:xfrm>
+          <a:off x="0" y="0"/>
+          <a:ext cx="0" cy="0"/>
+          <a:chOff x="0" y="0"/>
+          <a:chExt cx="0" cy="0"/>
+        </a:xfrm>
+      </p:grpSpPr>
       <p:sp>
         <p:nvSpPr>
           <p:cNvPr id="2" name="Title 1"/>
@@ -9700,7 +9859,7 @@
           <a:lstStyle/>
           <a:p>
             <a:r>
-              <a:rPr b="1" sz="3500">
+              <a:rPr sz="3500" b="1">
                 <a:solidFill>
                   <a:srgbClr val="2F3338"/>
                 </a:solidFill>
@@ -9753,6 +9912,7 @@
           <a:lstStyle/>
           <a:p>
             <a:pPr algn="ctr"/>
+            <a:endParaRPr/>
           </a:p>
         </p:txBody>
       </p:sp>
@@ -9798,6 +9958,7 @@
           <a:lstStyle/>
           <a:p>
             <a:pPr algn="ctr"/>
+            <a:endParaRPr/>
           </a:p>
         </p:txBody>
       </p:sp>
@@ -9885,6 +10046,7 @@
           <a:lstStyle/>
           <a:p>
             <a:pPr algn="ctr"/>
+            <a:endParaRPr/>
           </a:p>
         </p:txBody>
       </p:sp>
@@ -10250,6 +10412,7 @@
           <a:lstStyle/>
           <a:p>
             <a:pPr algn="ctr"/>
+            <a:endParaRPr/>
           </a:p>
         </p:txBody>
       </p:sp>
@@ -10304,7 +10467,7 @@
 </file>
 
 <file path=ppt/slides/slide22.xml><?xml version="1.0" encoding="utf-8"?>
-<p:sld xmlns:a="http://schemas.openxmlformats.org/drawingml/2006/main" xmlns:p="http://schemas.openxmlformats.org/presentationml/2006/main" xmlns:r="http://schemas.openxmlformats.org/officeDocument/2006/relationships">
+<p:sld xmlns:a="http://schemas.openxmlformats.org/drawingml/2006/main" xmlns:r="http://schemas.openxmlformats.org/officeDocument/2006/relationships" xmlns:p="http://schemas.openxmlformats.org/presentationml/2006/main">
   <p:cSld>
     <p:spTree>
       <p:nvGrpSpPr>
@@ -10312,7 +10475,14 @@
         <p:cNvGrpSpPr/>
         <p:nvPr/>
       </p:nvGrpSpPr>
-      <p:grpSpPr/>
+      <p:grpSpPr>
+        <a:xfrm>
+          <a:off x="0" y="0"/>
+          <a:ext cx="0" cy="0"/>
+          <a:chOff x="0" y="0"/>
+          <a:chExt cx="0" cy="0"/>
+        </a:xfrm>
+      </p:grpSpPr>
       <p:sp>
         <p:nvSpPr>
           <p:cNvPr id="2" name="Title 1"/>
@@ -10329,7 +10499,7 @@
           <a:lstStyle/>
           <a:p>
             <a:r>
-              <a:rPr b="1" sz="3500">
+              <a:rPr sz="3500" b="1">
                 <a:solidFill>
                   <a:srgbClr val="2F3338"/>
                 </a:solidFill>
@@ -10382,6 +10552,7 @@
           <a:lstStyle/>
           <a:p>
             <a:pPr algn="ctr"/>
+            <a:endParaRPr/>
           </a:p>
         </p:txBody>
       </p:sp>
@@ -10507,6 +10678,7 @@
           <a:lstStyle/>
           <a:p>
             <a:pPr algn="ctr"/>
+            <a:endParaRPr/>
           </a:p>
         </p:txBody>
       </p:sp>
@@ -10655,6 +10827,7 @@
           <a:lstStyle/>
           <a:p>
             <a:pPr algn="ctr"/>
+            <a:endParaRPr/>
           </a:p>
         </p:txBody>
       </p:sp>
@@ -10709,7 +10882,7 @@
 </file>
 
 <file path=ppt/slides/slide23.xml><?xml version="1.0" encoding="utf-8"?>
-<p:sld xmlns:a="http://schemas.openxmlformats.org/drawingml/2006/main" xmlns:p="http://schemas.openxmlformats.org/presentationml/2006/main" xmlns:r="http://schemas.openxmlformats.org/officeDocument/2006/relationships">
+<p:sld xmlns:a="http://schemas.openxmlformats.org/drawingml/2006/main" xmlns:r="http://schemas.openxmlformats.org/officeDocument/2006/relationships" xmlns:p="http://schemas.openxmlformats.org/presentationml/2006/main">
   <p:cSld>
     <p:spTree>
       <p:nvGrpSpPr>
@@ -10717,7 +10890,14 @@
         <p:cNvGrpSpPr/>
         <p:nvPr/>
       </p:nvGrpSpPr>
-      <p:grpSpPr/>
+      <p:grpSpPr>
+        <a:xfrm>
+          <a:off x="0" y="0"/>
+          <a:ext cx="0" cy="0"/>
+          <a:chOff x="0" y="0"/>
+          <a:chExt cx="0" cy="0"/>
+        </a:xfrm>
+      </p:grpSpPr>
       <p:sp>
         <p:nvSpPr>
           <p:cNvPr id="2" name="Title 1"/>
@@ -10734,7 +10914,7 @@
           <a:lstStyle/>
           <a:p>
             <a:r>
-              <a:rPr b="1" sz="3500">
+              <a:rPr sz="3500" b="1">
                 <a:solidFill>
                   <a:srgbClr val="2F3338"/>
                 </a:solidFill>
@@ -10787,6 +10967,7 @@
           <a:lstStyle/>
           <a:p>
             <a:pPr algn="ctr"/>
+            <a:endParaRPr/>
           </a:p>
         </p:txBody>
       </p:sp>
@@ -10832,6 +11013,7 @@
           <a:lstStyle/>
           <a:p>
             <a:pPr algn="ctr"/>
+            <a:endParaRPr/>
           </a:p>
         </p:txBody>
       </p:sp>
@@ -10919,6 +11101,7 @@
           <a:lstStyle/>
           <a:p>
             <a:pPr algn="ctr"/>
+            <a:endParaRPr/>
           </a:p>
         </p:txBody>
       </p:sp>
@@ -11322,6 +11505,7 @@
           <a:lstStyle/>
           <a:p>
             <a:pPr algn="ctr"/>
+            <a:endParaRPr/>
           </a:p>
         </p:txBody>
       </p:sp>
@@ -11376,7 +11560,7 @@
 </file>
 
 <file path=ppt/slides/slide24.xml><?xml version="1.0" encoding="utf-8"?>
-<p:sld xmlns:a="http://schemas.openxmlformats.org/drawingml/2006/main" xmlns:p="http://schemas.openxmlformats.org/presentationml/2006/main" xmlns:r="http://schemas.openxmlformats.org/officeDocument/2006/relationships">
+<p:sld xmlns:a="http://schemas.openxmlformats.org/drawingml/2006/main" xmlns:r="http://schemas.openxmlformats.org/officeDocument/2006/relationships" xmlns:p="http://schemas.openxmlformats.org/presentationml/2006/main">
   <p:cSld>
     <p:spTree>
       <p:nvGrpSpPr>
@@ -11384,7 +11568,14 @@
         <p:cNvGrpSpPr/>
         <p:nvPr/>
       </p:nvGrpSpPr>
-      <p:grpSpPr/>
+      <p:grpSpPr>
+        <a:xfrm>
+          <a:off x="0" y="0"/>
+          <a:ext cx="0" cy="0"/>
+          <a:chOff x="0" y="0"/>
+          <a:chExt cx="0" cy="0"/>
+        </a:xfrm>
+      </p:grpSpPr>
       <p:sp>
         <p:nvSpPr>
           <p:cNvPr id="2" name="Title 1"/>
@@ -11401,7 +11592,7 @@
           <a:lstStyle/>
           <a:p>
             <a:r>
-              <a:rPr b="1" sz="3500">
+              <a:rPr sz="3500" b="1">
                 <a:solidFill>
                   <a:srgbClr val="2F3338"/>
                 </a:solidFill>
@@ -11454,6 +11645,7 @@
           <a:lstStyle/>
           <a:p>
             <a:pPr algn="ctr"/>
+            <a:endParaRPr/>
           </a:p>
         </p:txBody>
       </p:sp>
@@ -11567,6 +11759,12 @@
                 <a:spcPts val="200"/>
               </a:spcAft>
             </a:pPr>
+            <a:endParaRPr sz="1150" b="0" i="0">
+              <a:solidFill>
+                <a:srgbClr val="D4D4D4"/>
+              </a:solidFill>
+              <a:latin typeface="Consolas"/>
+            </a:endParaRPr>
           </a:p>
           <a:p>
             <a:pPr algn="l">
@@ -11615,6 +11813,12 @@
                 <a:spcPts val="200"/>
               </a:spcAft>
             </a:pPr>
+            <a:endParaRPr sz="1150" b="0" i="0">
+              <a:solidFill>
+                <a:srgbClr val="D4D4D4"/>
+              </a:solidFill>
+              <a:latin typeface="Consolas"/>
+            </a:endParaRPr>
           </a:p>
           <a:p>
             <a:pPr algn="l">
@@ -11663,6 +11867,12 @@
                 <a:spcPts val="200"/>
               </a:spcAft>
             </a:pPr>
+            <a:endParaRPr sz="1150" b="0" i="0">
+              <a:solidFill>
+                <a:srgbClr val="D4D4D4"/>
+              </a:solidFill>
+              <a:latin typeface="Consolas"/>
+            </a:endParaRPr>
           </a:p>
           <a:p>
             <a:pPr algn="l">
@@ -11727,6 +11937,7 @@
           <a:lstStyle/>
           <a:p>
             <a:pPr algn="ctr"/>
+            <a:endParaRPr/>
           </a:p>
         </p:txBody>
       </p:sp>
@@ -11814,6 +12025,7 @@
           <a:lstStyle/>
           <a:p>
             <a:pPr algn="ctr"/>
+            <a:endParaRPr/>
           </a:p>
         </p:txBody>
       </p:sp>
@@ -11868,7 +12080,7 @@
 </file>
 
 <file path=ppt/slides/slide25.xml><?xml version="1.0" encoding="utf-8"?>
-<p:sld xmlns:a="http://schemas.openxmlformats.org/drawingml/2006/main" xmlns:p="http://schemas.openxmlformats.org/presentationml/2006/main" xmlns:r="http://schemas.openxmlformats.org/officeDocument/2006/relationships">
+<p:sld xmlns:a="http://schemas.openxmlformats.org/drawingml/2006/main" xmlns:r="http://schemas.openxmlformats.org/officeDocument/2006/relationships" xmlns:p="http://schemas.openxmlformats.org/presentationml/2006/main">
   <p:cSld>
     <p:spTree>
       <p:nvGrpSpPr>
@@ -11876,7 +12088,14 @@
         <p:cNvGrpSpPr/>
         <p:nvPr/>
       </p:nvGrpSpPr>
-      <p:grpSpPr/>
+      <p:grpSpPr>
+        <a:xfrm>
+          <a:off x="0" y="0"/>
+          <a:ext cx="0" cy="0"/>
+          <a:chOff x="0" y="0"/>
+          <a:chExt cx="0" cy="0"/>
+        </a:xfrm>
+      </p:grpSpPr>
       <p:sp>
         <p:nvSpPr>
           <p:cNvPr id="2" name="Title 1"/>
@@ -11893,7 +12112,7 @@
           <a:lstStyle/>
           <a:p>
             <a:r>
-              <a:rPr b="1" sz="3500">
+              <a:rPr sz="3500" b="1">
                 <a:solidFill>
                   <a:srgbClr val="2F3338"/>
                 </a:solidFill>
@@ -11946,6 +12165,7 @@
           <a:lstStyle/>
           <a:p>
             <a:pPr algn="ctr"/>
+            <a:endParaRPr/>
           </a:p>
         </p:txBody>
       </p:sp>
@@ -12109,6 +12329,7 @@
           <a:lstStyle/>
           <a:p>
             <a:pPr algn="ctr"/>
+            <a:endParaRPr/>
           </a:p>
         </p:txBody>
       </p:sp>
@@ -12276,6 +12497,7 @@
           <a:lstStyle/>
           <a:p>
             <a:pPr algn="ctr"/>
+            <a:endParaRPr/>
           </a:p>
         </p:txBody>
       </p:sp>
@@ -12330,7 +12552,7 @@
 </file>
 
 <file path=ppt/slides/slide26.xml><?xml version="1.0" encoding="utf-8"?>
-<p:sld xmlns:a="http://schemas.openxmlformats.org/drawingml/2006/main" xmlns:p="http://schemas.openxmlformats.org/presentationml/2006/main" xmlns:r="http://schemas.openxmlformats.org/officeDocument/2006/relationships">
+<p:sld xmlns:a="http://schemas.openxmlformats.org/drawingml/2006/main" xmlns:r="http://schemas.openxmlformats.org/officeDocument/2006/relationships" xmlns:p="http://schemas.openxmlformats.org/presentationml/2006/main">
   <p:cSld>
     <p:spTree>
       <p:nvGrpSpPr>
@@ -12338,7 +12560,14 @@
         <p:cNvGrpSpPr/>
         <p:nvPr/>
       </p:nvGrpSpPr>
-      <p:grpSpPr/>
+      <p:grpSpPr>
+        <a:xfrm>
+          <a:off x="0" y="0"/>
+          <a:ext cx="0" cy="0"/>
+          <a:chOff x="0" y="0"/>
+          <a:chExt cx="0" cy="0"/>
+        </a:xfrm>
+      </p:grpSpPr>
       <p:sp>
         <p:nvSpPr>
           <p:cNvPr id="2" name="Title 1"/>
@@ -12355,7 +12584,7 @@
           <a:lstStyle/>
           <a:p>
             <a:r>
-              <a:rPr b="1" sz="3500">
+              <a:rPr sz="3500" b="1">
                 <a:solidFill>
                   <a:srgbClr val="2F3338"/>
                 </a:solidFill>
@@ -12408,6 +12637,7 @@
           <a:lstStyle/>
           <a:p>
             <a:pPr algn="ctr"/>
+            <a:endParaRPr/>
           </a:p>
         </p:txBody>
       </p:sp>
@@ -12571,6 +12801,7 @@
           <a:lstStyle/>
           <a:p>
             <a:pPr algn="ctr"/>
+            <a:endParaRPr/>
           </a:p>
         </p:txBody>
       </p:sp>
@@ -12625,7 +12856,7 @@
 </file>
 
 <file path=ppt/slides/slide3.xml><?xml version="1.0" encoding="utf-8"?>
-<p:sld xmlns:a="http://schemas.openxmlformats.org/drawingml/2006/main" xmlns:p="http://schemas.openxmlformats.org/presentationml/2006/main" xmlns:r="http://schemas.openxmlformats.org/officeDocument/2006/relationships">
+<p:sld xmlns:a="http://schemas.openxmlformats.org/drawingml/2006/main" xmlns:r="http://schemas.openxmlformats.org/officeDocument/2006/relationships" xmlns:p="http://schemas.openxmlformats.org/presentationml/2006/main">
   <p:cSld>
     <p:spTree>
       <p:nvGrpSpPr>
@@ -12633,7 +12864,14 @@
         <p:cNvGrpSpPr/>
         <p:nvPr/>
       </p:nvGrpSpPr>
-      <p:grpSpPr/>
+      <p:grpSpPr>
+        <a:xfrm>
+          <a:off x="0" y="0"/>
+          <a:ext cx="0" cy="0"/>
+          <a:chOff x="0" y="0"/>
+          <a:chExt cx="0" cy="0"/>
+        </a:xfrm>
+      </p:grpSpPr>
       <p:sp>
         <p:nvSpPr>
           <p:cNvPr id="2" name="Title 1"/>
@@ -12650,7 +12888,7 @@
           <a:lstStyle/>
           <a:p>
             <a:r>
-              <a:rPr b="1" sz="3500">
+              <a:rPr sz="3500" b="1">
                 <a:solidFill>
                   <a:srgbClr val="2F3338"/>
                 </a:solidFill>
@@ -12764,6 +13002,7 @@
           <a:lstStyle/>
           <a:p>
             <a:pPr algn="ctr"/>
+            <a:endParaRPr/>
           </a:p>
         </p:txBody>
       </p:sp>
@@ -12950,6 +13189,7 @@
           <a:lstStyle/>
           <a:p>
             <a:pPr algn="ctr"/>
+            <a:endParaRPr/>
           </a:p>
         </p:txBody>
       </p:sp>
@@ -13004,7 +13244,7 @@
 </file>
 
 <file path=ppt/slides/slide4.xml><?xml version="1.0" encoding="utf-8"?>
-<p:sld xmlns:a="http://schemas.openxmlformats.org/drawingml/2006/main" xmlns:p="http://schemas.openxmlformats.org/presentationml/2006/main" xmlns:r="http://schemas.openxmlformats.org/officeDocument/2006/relationships">
+<p:sld xmlns:a="http://schemas.openxmlformats.org/drawingml/2006/main" xmlns:r="http://schemas.openxmlformats.org/officeDocument/2006/relationships" xmlns:p="http://schemas.openxmlformats.org/presentationml/2006/main">
   <p:cSld>
     <p:spTree>
       <p:nvGrpSpPr>
@@ -13012,7 +13252,14 @@
         <p:cNvGrpSpPr/>
         <p:nvPr/>
       </p:nvGrpSpPr>
-      <p:grpSpPr/>
+      <p:grpSpPr>
+        <a:xfrm>
+          <a:off x="0" y="0"/>
+          <a:ext cx="0" cy="0"/>
+          <a:chOff x="0" y="0"/>
+          <a:chExt cx="0" cy="0"/>
+        </a:xfrm>
+      </p:grpSpPr>
       <p:sp>
         <p:nvSpPr>
           <p:cNvPr id="2" name="Title 1"/>
@@ -13029,7 +13276,7 @@
           <a:lstStyle/>
           <a:p>
             <a:r>
-              <a:rPr b="1" sz="3500">
+              <a:rPr sz="3500" b="1">
                 <a:solidFill>
                   <a:srgbClr val="2F3338"/>
                 </a:solidFill>
@@ -13082,6 +13329,7 @@
           <a:lstStyle/>
           <a:p>
             <a:pPr algn="ctr"/>
+            <a:endParaRPr/>
           </a:p>
         </p:txBody>
       </p:sp>
@@ -13127,6 +13375,7 @@
           <a:lstStyle/>
           <a:p>
             <a:pPr algn="ctr"/>
+            <a:endParaRPr/>
           </a:p>
         </p:txBody>
       </p:sp>
@@ -13214,6 +13463,7 @@
           <a:lstStyle/>
           <a:p>
             <a:pPr algn="ctr"/>
+            <a:endParaRPr/>
           </a:p>
         </p:txBody>
       </p:sp>
@@ -13465,6 +13715,7 @@
           <a:lstStyle/>
           <a:p>
             <a:pPr algn="ctr"/>
+            <a:endParaRPr/>
           </a:p>
         </p:txBody>
       </p:sp>
@@ -13674,6 +13925,7 @@
           <a:lstStyle/>
           <a:p>
             <a:pPr algn="ctr"/>
+            <a:endParaRPr/>
           </a:p>
         </p:txBody>
       </p:sp>
@@ -13728,7 +13980,7 @@
 </file>
 
 <file path=ppt/slides/slide5.xml><?xml version="1.0" encoding="utf-8"?>
-<p:sld xmlns:a="http://schemas.openxmlformats.org/drawingml/2006/main" xmlns:p="http://schemas.openxmlformats.org/presentationml/2006/main" xmlns:r="http://schemas.openxmlformats.org/officeDocument/2006/relationships">
+<p:sld xmlns:a="http://schemas.openxmlformats.org/drawingml/2006/main" xmlns:r="http://schemas.openxmlformats.org/officeDocument/2006/relationships" xmlns:p="http://schemas.openxmlformats.org/presentationml/2006/main">
   <p:cSld>
     <p:spTree>
       <p:nvGrpSpPr>
@@ -13736,7 +13988,14 @@
         <p:cNvGrpSpPr/>
         <p:nvPr/>
       </p:nvGrpSpPr>
-      <p:grpSpPr/>
+      <p:grpSpPr>
+        <a:xfrm>
+          <a:off x="0" y="0"/>
+          <a:ext cx="0" cy="0"/>
+          <a:chOff x="0" y="0"/>
+          <a:chExt cx="0" cy="0"/>
+        </a:xfrm>
+      </p:grpSpPr>
       <p:sp>
         <p:nvSpPr>
           <p:cNvPr id="2" name="Title 1"/>
@@ -13753,7 +14012,7 @@
           <a:lstStyle/>
           <a:p>
             <a:r>
-              <a:rPr b="1" sz="3500">
+              <a:rPr sz="3500" b="1">
                 <a:solidFill>
                   <a:srgbClr val="2F3338"/>
                 </a:solidFill>
@@ -13848,6 +14107,7 @@
           <a:lstStyle/>
           <a:p>
             <a:pPr algn="ctr"/>
+            <a:endParaRPr/>
           </a:p>
         </p:txBody>
       </p:sp>
@@ -13893,6 +14153,7 @@
           <a:lstStyle/>
           <a:p>
             <a:pPr algn="ctr"/>
+            <a:endParaRPr/>
           </a:p>
         </p:txBody>
       </p:sp>
@@ -14136,6 +14397,7 @@
           <a:lstStyle/>
           <a:p>
             <a:pPr algn="ctr"/>
+            <a:endParaRPr/>
           </a:p>
         </p:txBody>
       </p:sp>
@@ -14190,7 +14452,7 @@
 </file>
 
 <file path=ppt/slides/slide6.xml><?xml version="1.0" encoding="utf-8"?>
-<p:sld xmlns:a="http://schemas.openxmlformats.org/drawingml/2006/main" xmlns:p="http://schemas.openxmlformats.org/presentationml/2006/main" xmlns:r="http://schemas.openxmlformats.org/officeDocument/2006/relationships">
+<p:sld xmlns:a="http://schemas.openxmlformats.org/drawingml/2006/main" xmlns:r="http://schemas.openxmlformats.org/officeDocument/2006/relationships" xmlns:p="http://schemas.openxmlformats.org/presentationml/2006/main">
   <p:cSld>
     <p:spTree>
       <p:nvGrpSpPr>
@@ -14198,7 +14460,14 @@
         <p:cNvGrpSpPr/>
         <p:nvPr/>
       </p:nvGrpSpPr>
-      <p:grpSpPr/>
+      <p:grpSpPr>
+        <a:xfrm>
+          <a:off x="0" y="0"/>
+          <a:ext cx="0" cy="0"/>
+          <a:chOff x="0" y="0"/>
+          <a:chExt cx="0" cy="0"/>
+        </a:xfrm>
+      </p:grpSpPr>
       <p:sp>
         <p:nvSpPr>
           <p:cNvPr id="2" name="Title 1"/>
@@ -14215,7 +14484,7 @@
           <a:lstStyle/>
           <a:p>
             <a:r>
-              <a:rPr b="1" sz="3500">
+              <a:rPr sz="3500" b="1">
                 <a:solidFill>
                   <a:srgbClr val="2F3338"/>
                 </a:solidFill>
@@ -14268,6 +14537,7 @@
           <a:lstStyle/>
           <a:p>
             <a:pPr algn="ctr"/>
+            <a:endParaRPr/>
           </a:p>
         </p:txBody>
       </p:sp>
@@ -14492,6 +14762,7 @@
           <a:lstStyle/>
           <a:p>
             <a:pPr algn="ctr"/>
+            <a:endParaRPr/>
           </a:p>
         </p:txBody>
       </p:sp>
@@ -14546,7 +14817,7 @@
 </file>
 
 <file path=ppt/slides/slide7.xml><?xml version="1.0" encoding="utf-8"?>
-<p:sld xmlns:a="http://schemas.openxmlformats.org/drawingml/2006/main" xmlns:p="http://schemas.openxmlformats.org/presentationml/2006/main" xmlns:r="http://schemas.openxmlformats.org/officeDocument/2006/relationships">
+<p:sld xmlns:a="http://schemas.openxmlformats.org/drawingml/2006/main" xmlns:r="http://schemas.openxmlformats.org/officeDocument/2006/relationships" xmlns:p="http://schemas.openxmlformats.org/presentationml/2006/main">
   <p:cSld>
     <p:spTree>
       <p:nvGrpSpPr>
@@ -14554,7 +14825,14 @@
         <p:cNvGrpSpPr/>
         <p:nvPr/>
       </p:nvGrpSpPr>
-      <p:grpSpPr/>
+      <p:grpSpPr>
+        <a:xfrm>
+          <a:off x="0" y="0"/>
+          <a:ext cx="0" cy="0"/>
+          <a:chOff x="0" y="0"/>
+          <a:chExt cx="0" cy="0"/>
+        </a:xfrm>
+      </p:grpSpPr>
       <p:sp>
         <p:nvSpPr>
           <p:cNvPr id="2" name="Title 1"/>
@@ -14571,7 +14849,7 @@
           <a:lstStyle/>
           <a:p>
             <a:r>
-              <a:rPr b="1" sz="3500">
+              <a:rPr sz="3500" b="1">
                 <a:solidFill>
                   <a:srgbClr val="2F3338"/>
                 </a:solidFill>
@@ -14624,6 +14902,7 @@
           <a:lstStyle/>
           <a:p>
             <a:pPr algn="ctr"/>
+            <a:endParaRPr/>
           </a:p>
         </p:txBody>
       </p:sp>
@@ -14829,6 +15108,7 @@
           <a:lstStyle/>
           <a:p>
             <a:pPr algn="ctr"/>
+            <a:endParaRPr/>
           </a:p>
         </p:txBody>
       </p:sp>
@@ -15565,6 +15845,7 @@
           <a:lstStyle/>
           <a:p>
             <a:pPr algn="ctr"/>
+            <a:endParaRPr/>
           </a:p>
         </p:txBody>
       </p:sp>
@@ -15619,7 +15900,7 @@
 </file>
 
 <file path=ppt/slides/slide8.xml><?xml version="1.0" encoding="utf-8"?>
-<p:sld xmlns:a="http://schemas.openxmlformats.org/drawingml/2006/main" xmlns:p="http://schemas.openxmlformats.org/presentationml/2006/main" xmlns:r="http://schemas.openxmlformats.org/officeDocument/2006/relationships">
+<p:sld xmlns:a="http://schemas.openxmlformats.org/drawingml/2006/main" xmlns:r="http://schemas.openxmlformats.org/officeDocument/2006/relationships" xmlns:p="http://schemas.openxmlformats.org/presentationml/2006/main">
   <p:cSld>
     <p:spTree>
       <p:nvGrpSpPr>
@@ -15627,7 +15908,14 @@
         <p:cNvGrpSpPr/>
         <p:nvPr/>
       </p:nvGrpSpPr>
-      <p:grpSpPr/>
+      <p:grpSpPr>
+        <a:xfrm>
+          <a:off x="0" y="0"/>
+          <a:ext cx="0" cy="0"/>
+          <a:chOff x="0" y="0"/>
+          <a:chExt cx="0" cy="0"/>
+        </a:xfrm>
+      </p:grpSpPr>
       <p:sp>
         <p:nvSpPr>
           <p:cNvPr id="2" name="Title 1"/>
@@ -15644,7 +15932,7 @@
           <a:lstStyle/>
           <a:p>
             <a:r>
-              <a:rPr b="1" sz="3500">
+              <a:rPr sz="3500" b="1">
                 <a:solidFill>
                   <a:srgbClr val="2F3338"/>
                 </a:solidFill>
@@ -15697,6 +15985,7 @@
           <a:lstStyle/>
           <a:p>
             <a:pPr algn="ctr"/>
+            <a:endParaRPr/>
           </a:p>
         </p:txBody>
       </p:sp>
@@ -15864,6 +16153,7 @@
           <a:lstStyle/>
           <a:p>
             <a:pPr algn="ctr"/>
+            <a:endParaRPr/>
           </a:p>
         </p:txBody>
       </p:sp>
@@ -15989,6 +16279,7 @@
           <a:lstStyle/>
           <a:p>
             <a:pPr algn="ctr"/>
+            <a:endParaRPr/>
           </a:p>
         </p:txBody>
       </p:sp>
@@ -16043,7 +16334,7 @@
 </file>
 
 <file path=ppt/slides/slide9.xml><?xml version="1.0" encoding="utf-8"?>
-<p:sld xmlns:a="http://schemas.openxmlformats.org/drawingml/2006/main" xmlns:p="http://schemas.openxmlformats.org/presentationml/2006/main" xmlns:r="http://schemas.openxmlformats.org/officeDocument/2006/relationships">
+<p:sld xmlns:a="http://schemas.openxmlformats.org/drawingml/2006/main" xmlns:r="http://schemas.openxmlformats.org/officeDocument/2006/relationships" xmlns:p="http://schemas.openxmlformats.org/presentationml/2006/main">
   <p:cSld>
     <p:spTree>
       <p:nvGrpSpPr>
@@ -16051,7 +16342,14 @@
         <p:cNvGrpSpPr/>
         <p:nvPr/>
       </p:nvGrpSpPr>
-      <p:grpSpPr/>
+      <p:grpSpPr>
+        <a:xfrm>
+          <a:off x="0" y="0"/>
+          <a:ext cx="0" cy="0"/>
+          <a:chOff x="0" y="0"/>
+          <a:chExt cx="0" cy="0"/>
+        </a:xfrm>
+      </p:grpSpPr>
       <p:sp>
         <p:nvSpPr>
           <p:cNvPr id="2" name="Title 1"/>
@@ -16068,7 +16366,7 @@
           <a:lstStyle/>
           <a:p>
             <a:r>
-              <a:rPr b="1" sz="3500">
+              <a:rPr sz="3500" b="1">
                 <a:solidFill>
                   <a:srgbClr val="2F3338"/>
                 </a:solidFill>
@@ -16163,6 +16461,7 @@
           <a:lstStyle/>
           <a:p>
             <a:pPr algn="ctr"/>
+            <a:endParaRPr/>
           </a:p>
         </p:txBody>
       </p:sp>
@@ -16208,6 +16507,7 @@
           <a:lstStyle/>
           <a:p>
             <a:pPr algn="ctr"/>
+            <a:endParaRPr/>
           </a:p>
         </p:txBody>
       </p:sp>
@@ -16489,6 +16789,7 @@
           <a:lstStyle/>
           <a:p>
             <a:pPr algn="ctr"/>
+            <a:endParaRPr/>
           </a:p>
         </p:txBody>
       </p:sp>
@@ -16585,7 +16886,7 @@
     </a:clrScheme>
     <a:fontScheme name="Retrospect">
       <a:majorFont>
-        <a:latin typeface="Bookman Old Style" panose="020F0302020204030204"/>
+        <a:latin typeface="Bookman Old Style"/>
         <a:ea typeface=""/>
         <a:cs typeface=""/>
         <a:font script="Jpan" typeface="ＭＳ Ｐゴシック"/>
@@ -16620,7 +16921,7 @@
         <a:font script="Geor" typeface="Sylfaen"/>
       </a:majorFont>
       <a:minorFont>
-        <a:latin typeface="Franklin Gothic Book" panose="020F0502020204030204"/>
+        <a:latin typeface="Franklin Gothic Book"/>
         <a:ea typeface=""/>
         <a:cs typeface=""/>
         <a:font script="Jpan" typeface="ＭＳ Ｐゴシック"/>
@@ -16819,13 +17120,42 @@
   <a:extraClrSchemeLst/>
   <a:extLst>
     <a:ext uri="{05A4C25C-085E-4340-85A3-A5531E510DB2}">
-      <thm15:themeFamily xmlns:thm15="http://schemas.microsoft.com/office/thememl/2012/main" name="TWO.pptx" id="{80AA9D2D-EE59-4148-A11E-A51EEE828B28}" vid="{AEAFD717-D3C8-4034-8F7E-D5220B0CCEB8}"/>
+      <thm15:themeFamily xmlns:thm15="http://schemas.microsoft.com/office/thememl/2012/main" xmlns="" name="TWO.pptx" id="{80AA9D2D-EE59-4148-A11E-A51EEE828B28}" vid="{AEAFD717-D3C8-4034-8F7E-D5220B0CCEB8}"/>
     </a:ext>
   </a:extLst>
 </a:theme>
 </file>
 
 <file path=customXml/item1.xml><?xml version="1.0" encoding="utf-8"?>
+<p:properties xmlns:p="http://schemas.microsoft.com/office/2006/metadata/properties" xmlns:xsi="http://www.w3.org/2001/XMLSchema-instance" xmlns:pc="http://schemas.microsoft.com/office/infopath/2007/PartnerControls">
+  <documentManagement>
+    <_ip_UnifiedCompliancePolicyUIAction xmlns="http://schemas.microsoft.com/sharepoint/v3" xsi:nil="true"/>
+    <Image xmlns="71af3243-3dd4-4a8d-8c0d-dd76da1f02a5">
+      <Url xsi:nil="true"/>
+      <Description xsi:nil="true"/>
+    </Image>
+    <Status xmlns="71af3243-3dd4-4a8d-8c0d-dd76da1f02a5">Not started</Status>
+    <Background xmlns="71af3243-3dd4-4a8d-8c0d-dd76da1f02a5">false</Background>
+    <_ip_UnifiedCompliancePolicyProperties xmlns="http://schemas.microsoft.com/sharepoint/v3" xsi:nil="true"/>
+    <ImageTagsTaxHTField xmlns="71af3243-3dd4-4a8d-8c0d-dd76da1f02a5">
+      <Terms xmlns="http://schemas.microsoft.com/office/infopath/2007/PartnerControls"/>
+    </ImageTagsTaxHTField>
+    <TaxCatchAll xmlns="230e9df3-be65-4c73-a93b-d1236ebd677e" xsi:nil="true"/>
+    <MediaServiceKeyPoints xmlns="71af3243-3dd4-4a8d-8c0d-dd76da1f02a5" xsi:nil="true"/>
+  </documentManagement>
+</p:properties>
+</file>
+
+<file path=customXml/item2.xml><?xml version="1.0" encoding="utf-8"?>
+<?mso-contentType ?>
+<FormTemplates xmlns="http://schemas.microsoft.com/sharepoint/v3/contenttype/forms">
+  <Display>DocumentLibraryForm</Display>
+  <Edit>DocumentLibraryForm</Edit>
+  <New>DocumentLibraryForm</New>
+</FormTemplates>
+</file>
+
+<file path=customXml/item3.xml><?xml version="1.0" encoding="utf-8"?>
 <ct:contentTypeSchema xmlns:ct="http://schemas.microsoft.com/office/2006/metadata/contentType" xmlns:ma="http://schemas.microsoft.com/office/2006/metadata/properties/metaAttributes" ct:_="" ma:_="" ma:contentTypeName="Document" ma:contentTypeID="0x01010079F111ED35F8CC479449609E8A0923A6" ma:contentTypeVersion="27" ma:contentTypeDescription="Create a new document." ma:contentTypeScope="" ma:versionID="c6f9a84f66a9c8b9a21755b9ffafb945">
   <xsd:schema xmlns:xsd="http://www.w3.org/2001/XMLSchema" xmlns:xs="http://www.w3.org/2001/XMLSchema" xmlns:p="http://schemas.microsoft.com/office/2006/metadata/properties" xmlns:ns1="http://schemas.microsoft.com/sharepoint/v3" xmlns:ns2="71af3243-3dd4-4a8d-8c0d-dd76da1f02a5" xmlns:ns3="16c05727-aa75-4e4a-9b5f-8a80a1165891" xmlns:ns4="230e9df3-be65-4c73-a93b-d1236ebd677e" targetNamespace="http://schemas.microsoft.com/office/2006/metadata/properties" ma:root="true" ma:fieldsID="27df39e3e7036dff54f89ddd5805ce72" ns1:_="" ns2:_="" ns3:_="" ns4:_="">
     <xsd:import namespace="http://schemas.microsoft.com/sharepoint/v3"/>
@@ -17131,36 +17461,27 @@
 </ct:contentTypeSchema>
 </file>
 
-<file path=customXml/item2.xml><?xml version="1.0" encoding="utf-8"?>
-<?mso-contentType ?>
-<FormTemplates xmlns="http://schemas.microsoft.com/sharepoint/v3/contenttype/forms">
-  <Display>DocumentLibraryForm</Display>
-  <Edit>DocumentLibraryForm</Edit>
-  <New>DocumentLibraryForm</New>
-</FormTemplates>
+<file path=customXml/itemProps1.xml><?xml version="1.0" encoding="utf-8"?>
+<ds:datastoreItem xmlns:ds="http://schemas.openxmlformats.org/officeDocument/2006/customXml" ds:itemID="{6F4F4D41-822D-40F2-A7AC-E4E6CB36CA7A}">
+  <ds:schemaRefs>
+    <ds:schemaRef ds:uri="http://schemas.microsoft.com/office/2006/metadata/properties"/>
+    <ds:schemaRef ds:uri="http://schemas.microsoft.com/office/infopath/2007/PartnerControls"/>
+    <ds:schemaRef ds:uri="http://schemas.microsoft.com/sharepoint/v3"/>
+    <ds:schemaRef ds:uri="71af3243-3dd4-4a8d-8c0d-dd76da1f02a5"/>
+    <ds:schemaRef ds:uri="230e9df3-be65-4c73-a93b-d1236ebd677e"/>
+  </ds:schemaRefs>
+</ds:datastoreItem>
 </file>
 
-<file path=customXml/item3.xml><?xml version="1.0" encoding="utf-8"?>
-<p:properties xmlns:p="http://schemas.microsoft.com/office/2006/metadata/properties" xmlns:xsi="http://www.w3.org/2001/XMLSchema-instance" xmlns:pc="http://schemas.microsoft.com/office/infopath/2007/PartnerControls">
-  <documentManagement>
-    <_ip_UnifiedCompliancePolicyUIAction xmlns="http://schemas.microsoft.com/sharepoint/v3" xsi:nil="true"/>
-    <Image xmlns="71af3243-3dd4-4a8d-8c0d-dd76da1f02a5">
-      <Url xsi:nil="true"/>
-      <Description xsi:nil="true"/>
-    </Image>
-    <Status xmlns="71af3243-3dd4-4a8d-8c0d-dd76da1f02a5">Not started</Status>
-    <Background xmlns="71af3243-3dd4-4a8d-8c0d-dd76da1f02a5">false</Background>
-    <_ip_UnifiedCompliancePolicyProperties xmlns="http://schemas.microsoft.com/sharepoint/v3" xsi:nil="true"/>
-    <ImageTagsTaxHTField xmlns="71af3243-3dd4-4a8d-8c0d-dd76da1f02a5">
-      <Terms xmlns="http://schemas.microsoft.com/office/infopath/2007/PartnerControls"/>
-    </ImageTagsTaxHTField>
-    <TaxCatchAll xmlns="230e9df3-be65-4c73-a93b-d1236ebd677e" xsi:nil="true"/>
-    <MediaServiceKeyPoints xmlns="71af3243-3dd4-4a8d-8c0d-dd76da1f02a5" xsi:nil="true"/>
-  </documentManagement>
-</p:properties>
+<file path=customXml/itemProps2.xml><?xml version="1.0" encoding="utf-8"?>
+<ds:datastoreItem xmlns:ds="http://schemas.openxmlformats.org/officeDocument/2006/customXml" ds:itemID="{19DAD249-BF80-48EF-9AFB-36A11BCDC2CE}">
+  <ds:schemaRefs>
+    <ds:schemaRef ds:uri="http://schemas.microsoft.com/sharepoint/v3/contenttype/forms"/>
+  </ds:schemaRefs>
+</ds:datastoreItem>
 </file>
 
-<file path=customXml/itemProps1.xml><?xml version="1.0" encoding="utf-8"?>
+<file path=customXml/itemProps3.xml><?xml version="1.0" encoding="utf-8"?>
 <ds:datastoreItem xmlns:ds="http://schemas.openxmlformats.org/officeDocument/2006/customXml" ds:itemID="{C5A59D56-2157-4202-9D02-F44E447A241D}">
   <ds:schemaRefs>
     <ds:schemaRef ds:uri="http://schemas.microsoft.com/office/2006/metadata/contentType"/>
@@ -17179,24 +17500,4 @@
     <ds:schemaRef ds:uri="http://schemas.microsoft.com/internal/obd"/>
   </ds:schemaRefs>
 </ds:datastoreItem>
-</file>
-
-<file path=customXml/itemProps2.xml><?xml version="1.0" encoding="utf-8"?>
-<ds:datastoreItem xmlns:ds="http://schemas.openxmlformats.org/officeDocument/2006/customXml" ds:itemID="{19DAD249-BF80-48EF-9AFB-36A11BCDC2CE}">
-  <ds:schemaRefs>
-    <ds:schemaRef ds:uri="http://schemas.microsoft.com/sharepoint/v3/contenttype/forms"/>
-  </ds:schemaRefs>
-</ds:datastoreItem>
-</file>
-
-<file path=customXml/itemProps3.xml><?xml version="1.0" encoding="utf-8"?>
-<ds:datastoreItem xmlns:ds="http://schemas.openxmlformats.org/officeDocument/2006/customXml" ds:itemID="{6F4F4D41-822D-40F2-A7AC-E4E6CB36CA7A}">
-  <ds:schemaRefs>
-    <ds:schemaRef ds:uri="http://schemas.microsoft.com/office/2006/metadata/properties"/>
-    <ds:schemaRef ds:uri="http://schemas.microsoft.com/office/infopath/2007/PartnerControls"/>
-    <ds:schemaRef ds:uri="http://schemas.microsoft.com/sharepoint/v3"/>
-    <ds:schemaRef ds:uri="71af3243-3dd4-4a8d-8c0d-dd76da1f02a5"/>
-    <ds:schemaRef ds:uri="230e9df3-be65-4c73-a93b-d1236ebd677e"/>
-  </ds:schemaRefs>
-</ds:datastoreItem>
 </file>